--- a/courses/build/farmer-money/R-D3.pptx
+++ b/courses/build/farmer-money/R-D3.pptx
@@ -4959,7 +4959,7 @@
     <p:bg>
       <p:bgPr>
         <a:solidFill>
-          <a:srgbClr val="1F4D2B"/>
+          <a:srgbClr val="4B2E4F"/>
         </a:solidFill>
         <a:effectLst/>
       </p:bgPr>
@@ -5001,9 +5001,9 @@
             <a:r>
               <a:rPr sz="1000" b="0">
                 <a:solidFill>
-                  <a:srgbClr val="A8D88A"/>
-                </a:solidFill>
-                <a:latin typeface="Arial"/>
+                  <a:srgbClr val="FFF4E0"/>
+                </a:solidFill>
+                <a:latin typeface="Calibri"/>
               </a:rPr>
               <a:t>R-D3-01</a:t>
             </a:r>
@@ -5040,9 +5040,9 @@
             <a:r>
               <a:rPr sz="1000" b="0">
                 <a:solidFill>
-                  <a:srgbClr val="A8D88A"/>
-                </a:solidFill>
-                <a:latin typeface="Arial"/>
+                  <a:srgbClr val="FFF4E0"/>
+                </a:solidFill>
+                <a:latin typeface="Calibri"/>
               </a:rPr>
               <a:t>Farmer Money</a:t>
             </a:r>
@@ -5079,9 +5079,9 @@
             <a:r>
               <a:rPr sz="4800" b="1">
                 <a:solidFill>
-                  <a:srgbClr val="F7F2E9"/>
-                </a:solidFill>
-                <a:latin typeface="Georgia"/>
+                  <a:srgbClr val="FFF4E0"/>
+                </a:solidFill>
+                <a:latin typeface="Arial Rounded MT Bold"/>
               </a:rPr>
               <a:t>Day 3 · Selling &amp; growing</a:t>
             </a:r>
@@ -5103,7 +5103,7 @@
             <a:avLst/>
           </a:prstGeom>
           <a:solidFill>
-            <a:srgbClr val="C07A1E"/>
+            <a:srgbClr val="2A8C82"/>
           </a:solidFill>
           <a:ln>
             <a:noFill/>
@@ -5162,9 +5162,9 @@
             <a:r>
               <a:rPr sz="2400" b="0">
                 <a:solidFill>
-                  <a:srgbClr val="A8D88A"/>
-                </a:solidFill>
-                <a:latin typeface="Arial"/>
+                  <a:srgbClr val="FFF4E0"/>
+                </a:solidFill>
+                <a:latin typeface="Calibri"/>
               </a:rPr>
               <a:t>Farmer Money · Day 3 of 3</a:t>
             </a:r>
@@ -5178,9 +5178,9 @@
             <a:r>
               <a:rPr sz="2400" b="0">
                 <a:solidFill>
-                  <a:srgbClr val="A8D88A"/>
-                </a:solidFill>
-                <a:latin typeface="Arial"/>
+                  <a:srgbClr val="FFF4E0"/>
+                </a:solidFill>
+                <a:latin typeface="Calibri"/>
               </a:rPr>
               <a:t>Sell well · borrow wisely · plan</a:t>
             </a:r>
@@ -5202,11 +5202,11 @@
             <a:avLst/>
           </a:prstGeom>
           <a:solidFill>
-            <a:srgbClr val="FBF6EC"/>
+            <a:srgbClr val="FFF4E0"/>
           </a:solidFill>
           <a:ln w="15875">
             <a:solidFill>
-              <a:srgbClr val="E2D8C4"/>
+              <a:srgbClr val="E0664A"/>
             </a:solidFill>
           </a:ln>
           <a:effectLst/>
@@ -5263,9 +5263,9 @@
             <a:r>
               <a:rPr sz="1200" b="1">
                 <a:solidFill>
-                  <a:srgbClr val="C07A1E"/>
-                </a:solidFill>
-                <a:latin typeface="Arial"/>
+                  <a:srgbClr val="2A8C82"/>
+                </a:solidFill>
+                <a:latin typeface="Calibri"/>
               </a:rPr>
               <a:t>IMAGE · R-IMG-05 · coming</a:t>
             </a:r>
@@ -5302,9 +5302,9 @@
             <a:r>
               <a:rPr sz="1800" b="1">
                 <a:solidFill>
-                  <a:srgbClr val="1F4D2B"/>
-                </a:solidFill>
-                <a:latin typeface="Georgia"/>
+                  <a:srgbClr val="2B2B2B"/>
+                </a:solidFill>
+                <a:latin typeface="Arial Rounded MT Bold"/>
               </a:rPr>
               <a:t>Market day</a:t>
             </a:r>
@@ -5341,9 +5341,9 @@
             <a:r>
               <a:rPr sz="1100" b="0">
                 <a:solidFill>
-                  <a:srgbClr val="20190F"/>
-                </a:solidFill>
-                <a:latin typeface="Arial"/>
+                  <a:srgbClr val="2B2B2B"/>
+                </a:solidFill>
+                <a:latin typeface="Calibri"/>
               </a:rPr>
               <a:t>A busy but friendly informal market scene at a taxi rank on a sunny morning (sun in the north). In the foreground a young woman grower hands a crate of even, clean bunches of greens to a creche cook in an apron, who counts them; the grower holds a small duplicate book and pen. Middle ground: a hawker's wheelbarrow stall with greens and tomatoes; a spaza…</a:t>
             </a:r>
@@ -5364,7 +5364,7 @@
     <p:bg>
       <p:bgPr>
         <a:solidFill>
-          <a:srgbClr val="F7F2E9"/>
+          <a:srgbClr val="FFF4E0"/>
         </a:solidFill>
         <a:effectLst/>
       </p:bgPr>
@@ -5406,9 +5406,9 @@
             <a:r>
               <a:rPr sz="1000" b="0">
                 <a:solidFill>
-                  <a:srgbClr val="6B6255"/>
-                </a:solidFill>
-                <a:latin typeface="Arial"/>
+                  <a:srgbClr val="2B2B2B"/>
+                </a:solidFill>
+                <a:latin typeface="Calibri"/>
               </a:rPr>
               <a:t>R-D3-10</a:t>
             </a:r>
@@ -5445,9 +5445,9 @@
             <a:r>
               <a:rPr sz="1000" b="0">
                 <a:solidFill>
-                  <a:srgbClr val="6B6255"/>
-                </a:solidFill>
-                <a:latin typeface="Arial"/>
+                  <a:srgbClr val="2B2B2B"/>
+                </a:solidFill>
+                <a:latin typeface="Calibri"/>
               </a:rPr>
               <a:t>Farmer Money</a:t>
             </a:r>
@@ -5469,7 +5469,7 @@
             <a:avLst/>
           </a:prstGeom>
           <a:solidFill>
-            <a:srgbClr val="235E86"/>
+            <a:srgbClr val="E0664A"/>
           </a:solidFill>
           <a:ln>
             <a:noFill/>
@@ -5528,9 +5528,9 @@
             <a:r>
               <a:rPr sz="1200" b="1">
                 <a:solidFill>
-                  <a:srgbClr val="F7F2E9"/>
-                </a:solidFill>
-                <a:latin typeface="Arial"/>
+                  <a:srgbClr val="FFF4E0"/>
+                </a:solidFill>
+                <a:latin typeface="Calibri"/>
               </a:rPr>
               <a:t>APP</a:t>
             </a:r>
@@ -5567,9 +5567,9 @@
             <a:r>
               <a:rPr sz="3800" b="1">
                 <a:solidFill>
-                  <a:srgbClr val="1F4D2B"/>
-                </a:solidFill>
-                <a:latin typeface="Georgia"/>
+                  <a:srgbClr val="2B2B2B"/>
+                </a:solidFill>
+                <a:latin typeface="Arial Rounded MT Bold"/>
               </a:rPr>
               <a:t>The Invoice builder</a:t>
             </a:r>
@@ -5591,7 +5591,7 @@
             <a:avLst/>
           </a:prstGeom>
           <a:solidFill>
-            <a:srgbClr val="E2D8C4"/>
+            <a:srgbClr val="E0664A"/>
           </a:solidFill>
           <a:ln>
             <a:noFill/>
@@ -5650,9 +5650,9 @@
             <a:r>
               <a:rPr sz="2800" b="0">
                 <a:solidFill>
-                  <a:srgbClr val="20190F"/>
-                </a:solidFill>
-                <a:latin typeface="Arial"/>
+                  <a:srgbClr val="2B2B2B"/>
+                </a:solidFill>
+                <a:latin typeface="Calibri"/>
               </a:rPr>
               <a:t>•  A new invoice</a:t>
             </a:r>
@@ -5666,9 +5666,9 @@
             <a:r>
               <a:rPr sz="2800" b="0">
                 <a:solidFill>
-                  <a:srgbClr val="20190F"/>
-                </a:solidFill>
-                <a:latin typeface="Arial"/>
+                  <a:srgbClr val="2B2B2B"/>
+                </a:solidFill>
+                <a:latin typeface="Calibri"/>
               </a:rPr>
               <a:t>•  Items, price, total due</a:t>
             </a:r>
@@ -5682,9 +5682,9 @@
             <a:r>
               <a:rPr sz="2800" b="0">
                 <a:solidFill>
-                  <a:srgbClr val="20190F"/>
-                </a:solidFill>
-                <a:latin typeface="Arial"/>
+                  <a:srgbClr val="2B2B2B"/>
+                </a:solidFill>
+                <a:latin typeface="Calibri"/>
               </a:rPr>
               <a:t>•  Has the buyer paid? Not yet</a:t>
             </a:r>
@@ -5729,7 +5729,7 @@
     <p:bg>
       <p:bgPr>
         <a:solidFill>
-          <a:srgbClr val="F7F2E9"/>
+          <a:srgbClr val="FFF4E0"/>
         </a:solidFill>
         <a:effectLst/>
       </p:bgPr>
@@ -5771,9 +5771,9 @@
             <a:r>
               <a:rPr sz="1000" b="0">
                 <a:solidFill>
-                  <a:srgbClr val="6B6255"/>
-                </a:solidFill>
-                <a:latin typeface="Arial"/>
+                  <a:srgbClr val="2B2B2B"/>
+                </a:solidFill>
+                <a:latin typeface="Calibri"/>
               </a:rPr>
               <a:t>R-D3-11</a:t>
             </a:r>
@@ -5810,9 +5810,9 @@
             <a:r>
               <a:rPr sz="1000" b="0">
                 <a:solidFill>
-                  <a:srgbClr val="6B6255"/>
-                </a:solidFill>
-                <a:latin typeface="Arial"/>
+                  <a:srgbClr val="2B2B2B"/>
+                </a:solidFill>
+                <a:latin typeface="Calibri"/>
               </a:rPr>
               <a:t>Farmer Money</a:t>
             </a:r>
@@ -5834,7 +5834,7 @@
             <a:avLst/>
           </a:prstGeom>
           <a:solidFill>
-            <a:srgbClr val="235E86"/>
+            <a:srgbClr val="E0664A"/>
           </a:solidFill>
           <a:ln>
             <a:noFill/>
@@ -5893,9 +5893,9 @@
             <a:r>
               <a:rPr sz="1200" b="1">
                 <a:solidFill>
-                  <a:srgbClr val="F7F2E9"/>
-                </a:solidFill>
-                <a:latin typeface="Arial"/>
+                  <a:srgbClr val="FFF4E0"/>
+                </a:solidFill>
+                <a:latin typeface="Calibri"/>
               </a:rPr>
               <a:t>APP</a:t>
             </a:r>
@@ -5932,9 +5932,9 @@
             <a:r>
               <a:rPr sz="3800" b="1">
                 <a:solidFill>
-                  <a:srgbClr val="1F4D2B"/>
-                </a:solidFill>
-                <a:latin typeface="Georgia"/>
+                  <a:srgbClr val="2B2B2B"/>
+                </a:solidFill>
+                <a:latin typeface="Arial Rounded MT Bold"/>
               </a:rPr>
               <a:t>Mark it paid — once</a:t>
             </a:r>
@@ -5956,7 +5956,7 @@
             <a:avLst/>
           </a:prstGeom>
           <a:solidFill>
-            <a:srgbClr val="E2D8C4"/>
+            <a:srgbClr val="E0664A"/>
           </a:solidFill>
           <a:ln>
             <a:noFill/>
@@ -6015,9 +6015,9 @@
             <a:r>
               <a:rPr sz="2800" b="0">
                 <a:solidFill>
-                  <a:srgbClr val="20190F"/>
-                </a:solidFill>
-                <a:latin typeface="Arial"/>
+                  <a:srgbClr val="2B2B2B"/>
+                </a:solidFill>
+                <a:latin typeface="Calibri"/>
               </a:rPr>
               <a:t>•  Open the saved invoice</a:t>
             </a:r>
@@ -6031,9 +6031,9 @@
             <a:r>
               <a:rPr sz="2800" b="0">
                 <a:solidFill>
-                  <a:srgbClr val="20190F"/>
-                </a:solidFill>
-                <a:latin typeface="Arial"/>
+                  <a:srgbClr val="2B2B2B"/>
+                </a:solidFill>
+                <a:latin typeface="Calibri"/>
               </a:rPr>
               <a:t>•  Yes — paid in full + date</a:t>
             </a:r>
@@ -6047,9 +6047,9 @@
             <a:r>
               <a:rPr sz="2800" b="0">
                 <a:solidFill>
-                  <a:srgbClr val="20190F"/>
-                </a:solidFill>
-                <a:latin typeface="Arial"/>
+                  <a:srgbClr val="2B2B2B"/>
+                </a:solidFill>
+                <a:latin typeface="Calibri"/>
               </a:rPr>
               <a:t>•  Don't also add it in Sold</a:t>
             </a:r>
@@ -6094,7 +6094,7 @@
     <p:bg>
       <p:bgPr>
         <a:solidFill>
-          <a:srgbClr val="F7F2E9"/>
+          <a:srgbClr val="FFF4E0"/>
         </a:solidFill>
         <a:effectLst/>
       </p:bgPr>
@@ -6136,9 +6136,9 @@
             <a:r>
               <a:rPr sz="1000" b="0">
                 <a:solidFill>
-                  <a:srgbClr val="6B6255"/>
-                </a:solidFill>
-                <a:latin typeface="Arial"/>
+                  <a:srgbClr val="2B2B2B"/>
+                </a:solidFill>
+                <a:latin typeface="Calibri"/>
               </a:rPr>
               <a:t>R-D3-12</a:t>
             </a:r>
@@ -6175,9 +6175,9 @@
             <a:r>
               <a:rPr sz="1000" b="0">
                 <a:solidFill>
-                  <a:srgbClr val="6B6255"/>
-                </a:solidFill>
-                <a:latin typeface="Arial"/>
+                  <a:srgbClr val="2B2B2B"/>
+                </a:solidFill>
+                <a:latin typeface="Calibri"/>
               </a:rPr>
               <a:t>Farmer Money</a:t>
             </a:r>
@@ -6214,9 +6214,9 @@
             <a:r>
               <a:rPr sz="3800" b="1">
                 <a:solidFill>
-                  <a:srgbClr val="1F4D2B"/>
-                </a:solidFill>
-                <a:latin typeface="Georgia"/>
+                  <a:srgbClr val="2B2B2B"/>
+                </a:solidFill>
+                <a:latin typeface="Arial Rounded MT Bold"/>
               </a:rPr>
               <a:t>Invoice and receipt books</a:t>
             </a:r>
@@ -6238,7 +6238,7 @@
             <a:avLst/>
           </a:prstGeom>
           <a:solidFill>
-            <a:srgbClr val="E2D8C4"/>
+            <a:srgbClr val="E0664A"/>
           </a:solidFill>
           <a:ln>
             <a:noFill/>
@@ -6297,9 +6297,9 @@
             <a:r>
               <a:rPr sz="2400" b="0">
                 <a:solidFill>
-                  <a:srgbClr val="20190F"/>
-                </a:solidFill>
-                <a:latin typeface="Arial"/>
+                  <a:srgbClr val="2B2B2B"/>
+                </a:solidFill>
+                <a:latin typeface="Calibri"/>
               </a:rPr>
               <a:t>•  Invoice: press hard, keep the copy</a:t>
             </a:r>
@@ -6313,9 +6313,9 @@
             <a:r>
               <a:rPr sz="2400" b="0">
                 <a:solidFill>
-                  <a:srgbClr val="20190F"/>
-                </a:solidFill>
-                <a:latin typeface="Arial"/>
+                  <a:srgbClr val="2B2B2B"/>
+                </a:solidFill>
+                <a:latin typeface="Calibri"/>
               </a:rPr>
               <a:t>•  Owed page: R360</a:t>
             </a:r>
@@ -6329,9 +6329,9 @@
             <a:r>
               <a:rPr sz="2400" b="0">
                 <a:solidFill>
-                  <a:srgbClr val="20190F"/>
-                </a:solidFill>
-                <a:latin typeface="Arial"/>
+                  <a:srgbClr val="2B2B2B"/>
+                </a:solidFill>
+                <a:latin typeface="Calibri"/>
               </a:rPr>
               <a:t>•  Paid? Receipt, tick, money in</a:t>
             </a:r>
@@ -6353,11 +6353,11 @@
             <a:avLst/>
           </a:prstGeom>
           <a:solidFill>
-            <a:srgbClr val="FBF6EC"/>
+            <a:srgbClr val="FFF4E0"/>
           </a:solidFill>
           <a:ln w="15875">
             <a:solidFill>
-              <a:srgbClr val="E2D8C4"/>
+              <a:srgbClr val="E0664A"/>
             </a:solidFill>
           </a:ln>
           <a:effectLst/>
@@ -6414,9 +6414,9 @@
             <a:r>
               <a:rPr sz="1200" b="1">
                 <a:solidFill>
-                  <a:srgbClr val="C07A1E"/>
-                </a:solidFill>
-                <a:latin typeface="Arial"/>
+                  <a:srgbClr val="2A8C82"/>
+                </a:solidFill>
+                <a:latin typeface="Calibri"/>
               </a:rPr>
               <a:t>PHOTO · R-PHO-01 · coming</a:t>
             </a:r>
@@ -6453,9 +6453,9 @@
             <a:r>
               <a:rPr sz="1800" b="1">
                 <a:solidFill>
-                  <a:srgbClr val="1F4D2B"/>
-                </a:solidFill>
-                <a:latin typeface="Georgia"/>
+                  <a:srgbClr val="2B2B2B"/>
+                </a:solidFill>
+                <a:latin typeface="Arial Rounded MT Bold"/>
               </a:rPr>
               <a:t>A real money book page and tin</a:t>
             </a:r>
@@ -6492,9 +6492,9 @@
             <a:r>
               <a:rPr sz="1100" b="0">
                 <a:solidFill>
-                  <a:srgbClr val="20190F"/>
-                </a:solidFill>
-                <a:latin typeface="Arial"/>
+                  <a:srgbClr val="2B2B2B"/>
+                </a:solidFill>
+                <a:latin typeface="Calibri"/>
               </a:rPr>
               <a:t>Real photograph, taken by the programme on Day 0: the course money book (P1) open on a wooden table, filled in by hand with **Lerato's week** (made-up data — never a learner's real book), a pencil, and a tin with its lid off showing play money. Daylight, from above, no faces. 1920 × 1080.</a:t>
             </a:r>
@@ -6515,7 +6515,7 @@
     <p:bg>
       <p:bgPr>
         <a:solidFill>
-          <a:srgbClr val="1F4D2B"/>
+          <a:srgbClr val="4B2E4F"/>
         </a:solidFill>
         <a:effectLst/>
       </p:bgPr>
@@ -6557,9 +6557,9 @@
             <a:r>
               <a:rPr sz="1000" b="0">
                 <a:solidFill>
-                  <a:srgbClr val="A8D88A"/>
-                </a:solidFill>
-                <a:latin typeface="Arial"/>
+                  <a:srgbClr val="FFF4E0"/>
+                </a:solidFill>
+                <a:latin typeface="Calibri"/>
               </a:rPr>
               <a:t>R-D3-13   ·   Poster R-P16</a:t>
             </a:r>
@@ -6596,9 +6596,9 @@
             <a:r>
               <a:rPr sz="1000" b="0">
                 <a:solidFill>
-                  <a:srgbClr val="A8D88A"/>
-                </a:solidFill>
-                <a:latin typeface="Arial"/>
+                  <a:srgbClr val="FFF4E0"/>
+                </a:solidFill>
+                <a:latin typeface="Calibri"/>
               </a:rPr>
               <a:t>Farmer Money</a:t>
             </a:r>
@@ -6635,9 +6635,9 @@
             <a:r>
               <a:rPr sz="4800" b="1">
                 <a:solidFill>
-                  <a:srgbClr val="F7F2E9"/>
-                </a:solidFill>
-                <a:latin typeface="Georgia"/>
+                  <a:srgbClr val="FFF4E0"/>
+                </a:solidFill>
+                <a:latin typeface="Arial Rounded MT Bold"/>
               </a:rPr>
               <a:t>Borrow wisely</a:t>
             </a:r>
@@ -6659,7 +6659,7 @@
             <a:avLst/>
           </a:prstGeom>
           <a:solidFill>
-            <a:srgbClr val="C07A1E"/>
+            <a:srgbClr val="2A8C82"/>
           </a:solidFill>
           <a:ln>
             <a:noFill/>
@@ -6718,9 +6718,9 @@
             <a:r>
               <a:rPr sz="2400" b="0">
                 <a:solidFill>
-                  <a:srgbClr val="A8D88A"/>
-                </a:solidFill>
-                <a:latin typeface="Arial"/>
+                  <a:srgbClr val="FFF4E0"/>
+                </a:solidFill>
+                <a:latin typeface="Calibri"/>
               </a:rPr>
               <a:t>Bongani wants a R3 000 pump</a:t>
             </a:r>
@@ -6734,9 +6734,9 @@
             <a:r>
               <a:rPr sz="2400" b="0">
                 <a:solidFill>
-                  <a:srgbClr val="A8D88A"/>
-                </a:solidFill>
-                <a:latin typeface="Arial"/>
+                  <a:srgbClr val="FFF4E0"/>
+                </a:solidFill>
+                <a:latin typeface="Calibri"/>
               </a:rPr>
               <a:t>Where can he get it?</a:t>
             </a:r>
@@ -6758,11 +6758,11 @@
             <a:avLst/>
           </a:prstGeom>
           <a:solidFill>
-            <a:srgbClr val="FBF6EC"/>
+            <a:srgbClr val="FFF4E0"/>
           </a:solidFill>
           <a:ln w="15875">
             <a:solidFill>
-              <a:srgbClr val="E2D8C4"/>
+              <a:srgbClr val="E0664A"/>
             </a:solidFill>
           </a:ln>
           <a:effectLst/>
@@ -6819,9 +6819,9 @@
             <a:r>
               <a:rPr sz="1200" b="1">
                 <a:solidFill>
-                  <a:srgbClr val="C07A1E"/>
-                </a:solidFill>
-                <a:latin typeface="Arial"/>
+                  <a:srgbClr val="2A8C82"/>
+                </a:solidFill>
+                <a:latin typeface="Calibri"/>
               </a:rPr>
               <a:t>POSTER ART · R-P16-ART · coming</a:t>
             </a:r>
@@ -6858,9 +6858,9 @@
             <a:r>
               <a:rPr sz="1800" b="1">
                 <a:solidFill>
-                  <a:srgbClr val="1F4D2B"/>
-                </a:solidFill>
-                <a:latin typeface="Georgia"/>
+                  <a:srgbClr val="2B2B2B"/>
+                </a:solidFill>
+                <a:latin typeface="Arial Rounded MT Bold"/>
               </a:rPr>
               <a:t>Artwork for R-P16 · Borrow wisely</a:t>
             </a:r>
@@ -6897,9 +6897,9 @@
             <a:r>
               <a:rPr sz="1100" b="0">
                 <a:solidFill>
-                  <a:srgbClr val="20190F"/>
-                </a:solidFill>
-                <a:latin typeface="Arial"/>
+                  <a:srgbClr val="2B2B2B"/>
+                </a:solidFill>
+                <a:latin typeface="Calibri"/>
               </a:rPr>
               <a:t>A young man (mid-20s, cap, overalls) stands at a crossroads, a thought bubble above him showing a small water pump. Four paths lead to: ① a street corner where only a pair of hands is shown, holding a thick stack of bank cards and ID books (the danger — no face, no ethnicity) ② a plain office desk with forms, a stamp, and a person explaining a paper ③ a…</a:t>
             </a:r>
@@ -6920,7 +6920,7 @@
     <p:bg>
       <p:bgPr>
         <a:solidFill>
-          <a:srgbClr val="F7F2E9"/>
+          <a:srgbClr val="FFF4E0"/>
         </a:solidFill>
         <a:effectLst/>
       </p:bgPr>
@@ -6962,9 +6962,9 @@
             <a:r>
               <a:rPr sz="1000" b="0">
                 <a:solidFill>
-                  <a:srgbClr val="6B6255"/>
-                </a:solidFill>
-                <a:latin typeface="Arial"/>
+                  <a:srgbClr val="2B2B2B"/>
+                </a:solidFill>
+                <a:latin typeface="Calibri"/>
               </a:rPr>
               <a:t>R-D3-14   ·   Poster R-P16</a:t>
             </a:r>
@@ -7001,9 +7001,9 @@
             <a:r>
               <a:rPr sz="1000" b="0">
                 <a:solidFill>
-                  <a:srgbClr val="6B6255"/>
-                </a:solidFill>
-                <a:latin typeface="Arial"/>
+                  <a:srgbClr val="2B2B2B"/>
+                </a:solidFill>
+                <a:latin typeface="Calibri"/>
               </a:rPr>
               <a:t>Farmer Money</a:t>
             </a:r>
@@ -7040,9 +7040,9 @@
             <a:r>
               <a:rPr sz="3800" b="1">
                 <a:solidFill>
-                  <a:srgbClr val="1F4D2B"/>
-                </a:solidFill>
-                <a:latin typeface="Georgia"/>
+                  <a:srgbClr val="2B2B2B"/>
+                </a:solidFill>
+                <a:latin typeface="Arial Rounded MT Bold"/>
               </a:rPr>
               <a:t>Five questions before you borrow</a:t>
             </a:r>
@@ -7064,7 +7064,7 @@
             <a:avLst/>
           </a:prstGeom>
           <a:solidFill>
-            <a:srgbClr val="E2D8C4"/>
+            <a:srgbClr val="E0664A"/>
           </a:solidFill>
           <a:ln>
             <a:noFill/>
@@ -7123,9 +7123,9 @@
             <a:r>
               <a:rPr sz="2800" b="0">
                 <a:solidFill>
-                  <a:srgbClr val="20190F"/>
-                </a:solidFill>
-                <a:latin typeface="Arial"/>
+                  <a:srgbClr val="2B2B2B"/>
+                </a:solidFill>
+                <a:latin typeface="Calibri"/>
               </a:rPr>
               <a:t>•  What for? Total cost?</a:t>
             </a:r>
@@ -7139,9 +7139,9 @@
             <a:r>
               <a:rPr sz="2800" b="0">
                 <a:solidFill>
-                  <a:srgbClr val="20190F"/>
-                </a:solidFill>
-                <a:latin typeface="Arial"/>
+                  <a:srgbClr val="2B2B2B"/>
+                </a:solidFill>
+                <a:latin typeface="Calibri"/>
               </a:rPr>
               <a:t>•  Can I pay? Registered?</a:t>
             </a:r>
@@ -7155,9 +7155,9 @@
             <a:r>
               <a:rPr sz="2800" b="0">
                 <a:solidFill>
-                  <a:srgbClr val="20190F"/>
-                </a:solidFill>
-                <a:latin typeface="Arial"/>
+                  <a:srgbClr val="2B2B2B"/>
+                </a:solidFill>
+                <a:latin typeface="Calibri"/>
               </a:rPr>
               <a:t>•  What if?</a:t>
             </a:r>
@@ -7179,11 +7179,11 @@
             <a:avLst/>
           </a:prstGeom>
           <a:solidFill>
-            <a:srgbClr val="FBF6EC"/>
+            <a:srgbClr val="FFF4E0"/>
           </a:solidFill>
           <a:ln w="15875">
             <a:solidFill>
-              <a:srgbClr val="E2D8C4"/>
+              <a:srgbClr val="E0664A"/>
             </a:solidFill>
           </a:ln>
           <a:effectLst/>
@@ -7240,9 +7240,9 @@
             <a:r>
               <a:rPr sz="1200" b="1">
                 <a:solidFill>
-                  <a:srgbClr val="C07A1E"/>
-                </a:solidFill>
-                <a:latin typeface="Arial"/>
+                  <a:srgbClr val="2A8C82"/>
+                </a:solidFill>
+                <a:latin typeface="Calibri"/>
               </a:rPr>
               <a:t>POSTER ART · R-P16-ART · coming</a:t>
             </a:r>
@@ -7279,9 +7279,9 @@
             <a:r>
               <a:rPr sz="1800" b="1">
                 <a:solidFill>
-                  <a:srgbClr val="1F4D2B"/>
-                </a:solidFill>
-                <a:latin typeface="Georgia"/>
+                  <a:srgbClr val="2B2B2B"/>
+                </a:solidFill>
+                <a:latin typeface="Arial Rounded MT Bold"/>
               </a:rPr>
               <a:t>Artwork for R-P16 · Borrow wisely</a:t>
             </a:r>
@@ -7318,9 +7318,9 @@
             <a:r>
               <a:rPr sz="1100" b="0">
                 <a:solidFill>
-                  <a:srgbClr val="20190F"/>
-                </a:solidFill>
-                <a:latin typeface="Arial"/>
+                  <a:srgbClr val="2B2B2B"/>
+                </a:solidFill>
+                <a:latin typeface="Calibri"/>
               </a:rPr>
               <a:t>A young man (mid-20s, cap, overalls) stands at a crossroads, a thought bubble above him showing a small water pump. Four paths lead to: ① a street corner where only a pair of hands is shown, holding a thick stack of bank cards and ID books (the danger — no face, no ethnicity) ② a plain office desk with forms, a stamp, and a person explaining a paper ③ a…</a:t>
             </a:r>
@@ -7341,7 +7341,7 @@
     <p:bg>
       <p:bgPr>
         <a:solidFill>
-          <a:srgbClr val="F7F2E9"/>
+          <a:srgbClr val="FFF4E0"/>
         </a:solidFill>
         <a:effectLst/>
       </p:bgPr>
@@ -7383,9 +7383,9 @@
             <a:r>
               <a:rPr sz="1000" b="0">
                 <a:solidFill>
-                  <a:srgbClr val="6B6255"/>
-                </a:solidFill>
-                <a:latin typeface="Arial"/>
+                  <a:srgbClr val="2B2B2B"/>
+                </a:solidFill>
+                <a:latin typeface="Calibri"/>
               </a:rPr>
               <a:t>R-D3-15</a:t>
             </a:r>
@@ -7422,9 +7422,9 @@
             <a:r>
               <a:rPr sz="1000" b="0">
                 <a:solidFill>
-                  <a:srgbClr val="6B6255"/>
-                </a:solidFill>
-                <a:latin typeface="Arial"/>
+                  <a:srgbClr val="2B2B2B"/>
+                </a:solidFill>
+                <a:latin typeface="Calibri"/>
               </a:rPr>
               <a:t>Farmer Money</a:t>
             </a:r>
@@ -7446,7 +7446,7 @@
             <a:avLst/>
           </a:prstGeom>
           <a:solidFill>
-            <a:srgbClr val="C07A1E"/>
+            <a:srgbClr val="2A8C82"/>
           </a:solidFill>
           <a:ln>
             <a:noFill/>
@@ -7505,9 +7505,9 @@
             <a:r>
               <a:rPr sz="1400" b="1">
                 <a:solidFill>
-                  <a:srgbClr val="F7F2E9"/>
-                </a:solidFill>
-                <a:latin typeface="Arial"/>
+                  <a:srgbClr val="FFF4E0"/>
+                </a:solidFill>
+                <a:latin typeface="Calibri"/>
               </a:rPr>
               <a:t>YOUR TURN</a:t>
             </a:r>
@@ -7544,9 +7544,9 @@
             <a:r>
               <a:rPr sz="3800" b="1">
                 <a:solidFill>
-                  <a:srgbClr val="1F4D2B"/>
-                </a:solidFill>
-                <a:latin typeface="Georgia"/>
+                  <a:srgbClr val="2B2B2B"/>
+                </a:solidFill>
+                <a:latin typeface="Arial Rounded MT Bold"/>
               </a:rPr>
               <a:t>Four ways to get R3 000</a:t>
             </a:r>
@@ -7568,7 +7568,7 @@
             <a:avLst/>
           </a:prstGeom>
           <a:solidFill>
-            <a:srgbClr val="E2D8C4"/>
+            <a:srgbClr val="E0664A"/>
           </a:solidFill>
           <a:ln>
             <a:noFill/>
@@ -7627,9 +7627,9 @@
             <a:r>
               <a:rPr sz="3000" b="1">
                 <a:solidFill>
-                  <a:srgbClr val="20190F"/>
-                </a:solidFill>
-                <a:latin typeface="Arial"/>
+                  <a:srgbClr val="2B2B2B"/>
+                </a:solidFill>
+                <a:latin typeface="Calibri"/>
               </a:rPr>
               <a:t>•  Count each offer in play money</a:t>
             </a:r>
@@ -7643,9 +7643,9 @@
             <a:r>
               <a:rPr sz="3000" b="1">
                 <a:solidFill>
-                  <a:srgbClr val="20190F"/>
-                </a:solidFill>
-                <a:latin typeface="Arial"/>
+                  <a:srgbClr val="2B2B2B"/>
+                </a:solidFill>
+                <a:latin typeface="Calibri"/>
               </a:rPr>
               <a:t>•  Gets · pays back · cost</a:t>
             </a:r>
@@ -7659,9 +7659,9 @@
             <a:r>
               <a:rPr sz="3000" b="1">
                 <a:solidFill>
-                  <a:srgbClr val="20190F"/>
-                </a:solidFill>
-                <a:latin typeface="Arial"/>
+                  <a:srgbClr val="2B2B2B"/>
+                </a:solidFill>
+                <a:latin typeface="Calibri"/>
               </a:rPr>
               <a:t>•  Can the garden pay? (20 min)</a:t>
             </a:r>
@@ -7682,7 +7682,7 @@
     <p:bg>
       <p:bgPr>
         <a:solidFill>
-          <a:srgbClr val="F7F2E9"/>
+          <a:srgbClr val="FFF4E0"/>
         </a:solidFill>
         <a:effectLst/>
       </p:bgPr>
@@ -7724,9 +7724,9 @@
             <a:r>
               <a:rPr sz="1000" b="0">
                 <a:solidFill>
-                  <a:srgbClr val="6B6255"/>
-                </a:solidFill>
-                <a:latin typeface="Arial"/>
+                  <a:srgbClr val="2B2B2B"/>
+                </a:solidFill>
+                <a:latin typeface="Calibri"/>
               </a:rPr>
               <a:t>R-D3-16   ·   Poster R-P16</a:t>
             </a:r>
@@ -7763,9 +7763,9 @@
             <a:r>
               <a:rPr sz="1000" b="0">
                 <a:solidFill>
-                  <a:srgbClr val="6B6255"/>
-                </a:solidFill>
-                <a:latin typeface="Arial"/>
+                  <a:srgbClr val="2B2B2B"/>
+                </a:solidFill>
+                <a:latin typeface="Calibri"/>
               </a:rPr>
               <a:t>Farmer Money</a:t>
             </a:r>
@@ -7802,9 +7802,9 @@
             <a:r>
               <a:rPr sz="3800" b="1">
                 <a:solidFill>
-                  <a:srgbClr val="1F4D2B"/>
-                </a:solidFill>
-                <a:latin typeface="Georgia"/>
+                  <a:srgbClr val="2B2B2B"/>
+                </a:solidFill>
+                <a:latin typeface="Arial Rounded MT Bold"/>
               </a:rPr>
               <a:t>Spot the illegal lender · the reserve</a:t>
             </a:r>
@@ -7826,7 +7826,7 @@
             <a:avLst/>
           </a:prstGeom>
           <a:solidFill>
-            <a:srgbClr val="E2D8C4"/>
+            <a:srgbClr val="E0664A"/>
           </a:solidFill>
           <a:ln>
             <a:noFill/>
@@ -7885,9 +7885,9 @@
             <a:r>
               <a:rPr sz="2800" b="0">
                 <a:solidFill>
-                  <a:srgbClr val="20190F"/>
-                </a:solidFill>
-                <a:latin typeface="Arial"/>
+                  <a:srgbClr val="2B2B2B"/>
+                </a:solidFill>
+                <a:latin typeface="Calibri"/>
               </a:rPr>
               <a:t>•  Keeps your card? Walk away</a:t>
             </a:r>
@@ -7901,9 +7901,9 @@
             <a:r>
               <a:rPr sz="2800" b="0">
                 <a:solidFill>
-                  <a:srgbClr val="20190F"/>
-                </a:solidFill>
-                <a:latin typeface="Arial"/>
+                  <a:srgbClr val="2B2B2B"/>
+                </a:solidFill>
+                <a:latin typeface="Calibri"/>
               </a:rPr>
               <a:t>•  No NCR number? Walk away</a:t>
             </a:r>
@@ -7917,9 +7917,9 @@
             <a:r>
               <a:rPr sz="2800" b="0">
                 <a:solidFill>
-                  <a:srgbClr val="20190F"/>
-                </a:solidFill>
-                <a:latin typeface="Arial"/>
+                  <a:srgbClr val="2B2B2B"/>
+                </a:solidFill>
+                <a:latin typeface="Calibri"/>
               </a:rPr>
               <a:t>•  Reserve: R20 a week</a:t>
             </a:r>
@@ -7941,11 +7941,11 @@
             <a:avLst/>
           </a:prstGeom>
           <a:solidFill>
-            <a:srgbClr val="FBF6EC"/>
+            <a:srgbClr val="FFF4E0"/>
           </a:solidFill>
           <a:ln w="15875">
             <a:solidFill>
-              <a:srgbClr val="E2D8C4"/>
+              <a:srgbClr val="E0664A"/>
             </a:solidFill>
           </a:ln>
           <a:effectLst/>
@@ -8002,9 +8002,9 @@
             <a:r>
               <a:rPr sz="1200" b="1">
                 <a:solidFill>
-                  <a:srgbClr val="C07A1E"/>
-                </a:solidFill>
-                <a:latin typeface="Arial"/>
+                  <a:srgbClr val="2A8C82"/>
+                </a:solidFill>
+                <a:latin typeface="Calibri"/>
               </a:rPr>
               <a:t>POSTER ART · R-P16-ART · coming</a:t>
             </a:r>
@@ -8041,9 +8041,9 @@
             <a:r>
               <a:rPr sz="1800" b="1">
                 <a:solidFill>
-                  <a:srgbClr val="1F4D2B"/>
-                </a:solidFill>
-                <a:latin typeface="Georgia"/>
+                  <a:srgbClr val="2B2B2B"/>
+                </a:solidFill>
+                <a:latin typeface="Arial Rounded MT Bold"/>
               </a:rPr>
               <a:t>Artwork for R-P16 · Borrow wisely</a:t>
             </a:r>
@@ -8080,9 +8080,9 @@
             <a:r>
               <a:rPr sz="1100" b="0">
                 <a:solidFill>
-                  <a:srgbClr val="20190F"/>
-                </a:solidFill>
-                <a:latin typeface="Arial"/>
+                  <a:srgbClr val="2B2B2B"/>
+                </a:solidFill>
+                <a:latin typeface="Calibri"/>
               </a:rPr>
               <a:t>A young man (mid-20s, cap, overalls) stands at a crossroads, a thought bubble above him showing a small water pump. Four paths lead to: ① a street corner where only a pair of hands is shown, holding a thick stack of bank cards and ID books (the danger — no face, no ethnicity) ② a plain office desk with forms, a stamp, and a person explaining a paper ③ a…</a:t>
             </a:r>
@@ -8103,7 +8103,7 @@
     <p:bg>
       <p:bgPr>
         <a:solidFill>
-          <a:srgbClr val="F7F2E9"/>
+          <a:srgbClr val="FFF4E0"/>
         </a:solidFill>
         <a:effectLst/>
       </p:bgPr>
@@ -8145,9 +8145,9 @@
             <a:r>
               <a:rPr sz="1000" b="0">
                 <a:solidFill>
-                  <a:srgbClr val="6B6255"/>
-                </a:solidFill>
-                <a:latin typeface="Arial"/>
+                  <a:srgbClr val="2B2B2B"/>
+                </a:solidFill>
+                <a:latin typeface="Calibri"/>
               </a:rPr>
               <a:t>R-D3-17   ·   Poster R-P17</a:t>
             </a:r>
@@ -8184,9 +8184,9 @@
             <a:r>
               <a:rPr sz="1000" b="0">
                 <a:solidFill>
-                  <a:srgbClr val="6B6255"/>
-                </a:solidFill>
-                <a:latin typeface="Arial"/>
+                  <a:srgbClr val="2B2B2B"/>
+                </a:solidFill>
+                <a:latin typeface="Calibri"/>
               </a:rPr>
               <a:t>Farmer Money</a:t>
             </a:r>
@@ -8223,9 +8223,9 @@
             <a:r>
               <a:rPr sz="3800" b="1">
                 <a:solidFill>
-                  <a:srgbClr val="1F4D2B"/>
-                </a:solidFill>
-                <a:latin typeface="Georgia"/>
+                  <a:srgbClr val="2B2B2B"/>
+                </a:solidFill>
+                <a:latin typeface="Arial Rounded MT Bold"/>
               </a:rPr>
               <a:t>My money plan</a:t>
             </a:r>
@@ -8247,7 +8247,7 @@
             <a:avLst/>
           </a:prstGeom>
           <a:solidFill>
-            <a:srgbClr val="E2D8C4"/>
+            <a:srgbClr val="E0664A"/>
           </a:solidFill>
           <a:ln>
             <a:noFill/>
@@ -8306,9 +8306,9 @@
             <a:r>
               <a:rPr sz="2800" b="0">
                 <a:solidFill>
-                  <a:srgbClr val="20190F"/>
-                </a:solidFill>
-                <a:latin typeface="Arial"/>
+                  <a:srgbClr val="2B2B2B"/>
+                </a:solidFill>
+                <a:latin typeface="Calibri"/>
               </a:rPr>
               <a:t>•  Goal · three tins · book day</a:t>
             </a:r>
@@ -8322,9 +8322,9 @@
             <a:r>
               <a:rPr sz="2800" b="0">
                 <a:solidFill>
-                  <a:srgbClr val="20190F"/>
-                </a:solidFill>
-                <a:latin typeface="Arial"/>
+                  <a:srgbClr val="2B2B2B"/>
+                </a:solidFill>
+                <a:latin typeface="Calibri"/>
               </a:rPr>
               <a:t>•  Pinch month and reserve</a:t>
             </a:r>
@@ -8338,9 +8338,9 @@
             <a:r>
               <a:rPr sz="2800" b="0">
                 <a:solidFill>
-                  <a:srgbClr val="20190F"/>
-                </a:solidFill>
-                <a:latin typeface="Arial"/>
+                  <a:srgbClr val="2B2B2B"/>
+                </a:solidFill>
+                <a:latin typeface="Calibri"/>
               </a:rPr>
               <a:t>•  One step next month</a:t>
             </a:r>
@@ -8362,11 +8362,11 @@
             <a:avLst/>
           </a:prstGeom>
           <a:solidFill>
-            <a:srgbClr val="FBF6EC"/>
+            <a:srgbClr val="FFF4E0"/>
           </a:solidFill>
           <a:ln w="15875">
             <a:solidFill>
-              <a:srgbClr val="E2D8C4"/>
+              <a:srgbClr val="E0664A"/>
             </a:solidFill>
           </a:ln>
           <a:effectLst/>
@@ -8423,9 +8423,9 @@
             <a:r>
               <a:rPr sz="1200" b="1">
                 <a:solidFill>
-                  <a:srgbClr val="C07A1E"/>
-                </a:solidFill>
-                <a:latin typeface="Arial"/>
+                  <a:srgbClr val="2A8C82"/>
+                </a:solidFill>
+                <a:latin typeface="Calibri"/>
               </a:rPr>
               <a:t>POSTER ART · R-P17-ART · coming</a:t>
             </a:r>
@@ -8462,9 +8462,9 @@
             <a:r>
               <a:rPr sz="1800" b="1">
                 <a:solidFill>
-                  <a:srgbClr val="1F4D2B"/>
-                </a:solidFill>
-                <a:latin typeface="Georgia"/>
+                  <a:srgbClr val="2B2B2B"/>
+                </a:solidFill>
+                <a:latin typeface="Arial Rounded MT Bold"/>
               </a:rPr>
               <a:t>Artwork for R-P17 · My money plan</a:t>
             </a:r>
@@ -8501,9 +8501,9 @@
             <a:r>
               <a:rPr sz="1100" b="0">
                 <a:solidFill>
-                  <a:srgbClr val="20190F"/>
-                </a:solidFill>
-                <a:latin typeface="Arial"/>
+                  <a:srgbClr val="2B2B2B"/>
+                </a:solidFill>
+                <a:latin typeface="Calibri"/>
               </a:rPr>
               <a:t>A woman in her 30s and a young man sit at a table outdoors, each drawing on a large sheet. Around them, floating like a mind-map, five small pictures: ① a goal (a school uniform, a water tank, a small shelter for a stall) ② three tins ③ an open money book with a pencil and a sun/moon symbol (when I write) ④ a calendar with one month circled and a small…</a:t>
             </a:r>
@@ -8524,7 +8524,7 @@
     <p:bg>
       <p:bgPr>
         <a:solidFill>
-          <a:srgbClr val="F7F2E9"/>
+          <a:srgbClr val="FFF4E0"/>
         </a:solidFill>
         <a:effectLst/>
       </p:bgPr>
@@ -8566,9 +8566,9 @@
             <a:r>
               <a:rPr sz="1000" b="0">
                 <a:solidFill>
-                  <a:srgbClr val="6B6255"/>
-                </a:solidFill>
-                <a:latin typeface="Arial"/>
+                  <a:srgbClr val="2B2B2B"/>
+                </a:solidFill>
+                <a:latin typeface="Calibri"/>
               </a:rPr>
               <a:t>R-D3-18</a:t>
             </a:r>
@@ -8605,9 +8605,9 @@
             <a:r>
               <a:rPr sz="1000" b="0">
                 <a:solidFill>
-                  <a:srgbClr val="6B6255"/>
-                </a:solidFill>
-                <a:latin typeface="Arial"/>
+                  <a:srgbClr val="2B2B2B"/>
+                </a:solidFill>
+                <a:latin typeface="Calibri"/>
               </a:rPr>
               <a:t>Farmer Money</a:t>
             </a:r>
@@ -8629,7 +8629,7 @@
             <a:avLst/>
           </a:prstGeom>
           <a:solidFill>
-            <a:srgbClr val="C07A1E"/>
+            <a:srgbClr val="2A8C82"/>
           </a:solidFill>
           <a:ln>
             <a:noFill/>
@@ -8688,9 +8688,9 @@
             <a:r>
               <a:rPr sz="1400" b="1">
                 <a:solidFill>
-                  <a:srgbClr val="F7F2E9"/>
-                </a:solidFill>
-                <a:latin typeface="Arial"/>
+                  <a:srgbClr val="FFF4E0"/>
+                </a:solidFill>
+                <a:latin typeface="Calibri"/>
               </a:rPr>
               <a:t>YOUR TURN</a:t>
             </a:r>
@@ -8727,9 +8727,9 @@
             <a:r>
               <a:rPr sz="3800" b="1">
                 <a:solidFill>
-                  <a:srgbClr val="1F4D2B"/>
-                </a:solidFill>
-                <a:latin typeface="Georgia"/>
+                  <a:srgbClr val="2B2B2B"/>
+                </a:solidFill>
+                <a:latin typeface="Arial Rounded MT Bold"/>
               </a:rPr>
               <a:t>Make and share your plan</a:t>
             </a:r>
@@ -8751,7 +8751,7 @@
             <a:avLst/>
           </a:prstGeom>
           <a:solidFill>
-            <a:srgbClr val="E2D8C4"/>
+            <a:srgbClr val="E0664A"/>
           </a:solidFill>
           <a:ln>
             <a:noFill/>
@@ -8810,9 +8810,9 @@
             <a:r>
               <a:rPr sz="3000" b="1">
                 <a:solidFill>
-                  <a:srgbClr val="20190F"/>
-                </a:solidFill>
-                <a:latin typeface="Arial"/>
+                  <a:srgbClr val="2B2B2B"/>
+                </a:solidFill>
+                <a:latin typeface="Calibri"/>
               </a:rPr>
               <a:t>•  15 min: my own plan</a:t>
             </a:r>
@@ -8826,9 +8826,9 @@
             <a:r>
               <a:rPr sz="3000" b="1">
                 <a:solidFill>
-                  <a:srgbClr val="20190F"/>
-                </a:solidFill>
-                <a:latin typeface="Arial"/>
+                  <a:srgbClr val="2B2B2B"/>
+                </a:solidFill>
+                <a:latin typeface="Calibri"/>
               </a:rPr>
               <a:t>•  2 min each: goal and one step</a:t>
             </a:r>
@@ -8842,9 +8842,9 @@
             <a:r>
               <a:rPr sz="3000" b="1">
                 <a:solidFill>
-                  <a:srgbClr val="20190F"/>
-                </a:solidFill>
-                <a:latin typeface="Arial"/>
+                  <a:srgbClr val="2B2B2B"/>
+                </a:solidFill>
+                <a:latin typeface="Calibri"/>
               </a:rPr>
               <a:t>•  One star from the group</a:t>
             </a:r>
@@ -8865,7 +8865,7 @@
     <p:bg>
       <p:bgPr>
         <a:solidFill>
-          <a:srgbClr val="F7F2E9"/>
+          <a:srgbClr val="FFF4E0"/>
         </a:solidFill>
         <a:effectLst/>
       </p:bgPr>
@@ -8907,9 +8907,9 @@
             <a:r>
               <a:rPr sz="1000" b="0">
                 <a:solidFill>
-                  <a:srgbClr val="6B6255"/>
-                </a:solidFill>
-                <a:latin typeface="Arial"/>
+                  <a:srgbClr val="2B2B2B"/>
+                </a:solidFill>
+                <a:latin typeface="Calibri"/>
               </a:rPr>
               <a:t>R-D3-19</a:t>
             </a:r>
@@ -8946,9 +8946,9 @@
             <a:r>
               <a:rPr sz="1000" b="0">
                 <a:solidFill>
-                  <a:srgbClr val="6B6255"/>
-                </a:solidFill>
-                <a:latin typeface="Arial"/>
+                  <a:srgbClr val="2B2B2B"/>
+                </a:solidFill>
+                <a:latin typeface="Calibri"/>
               </a:rPr>
               <a:t>Farmer Money</a:t>
             </a:r>
@@ -8970,7 +8970,7 @@
             <a:avLst/>
           </a:prstGeom>
           <a:solidFill>
-            <a:srgbClr val="C07A1E"/>
+            <a:srgbClr val="2A8C82"/>
           </a:solidFill>
           <a:ln>
             <a:noFill/>
@@ -9029,9 +9029,9 @@
             <a:r>
               <a:rPr sz="1400" b="1">
                 <a:solidFill>
-                  <a:srgbClr val="F7F2E9"/>
-                </a:solidFill>
-                <a:latin typeface="Arial"/>
+                  <a:srgbClr val="FFF4E0"/>
+                </a:solidFill>
+                <a:latin typeface="Calibri"/>
               </a:rPr>
               <a:t>YOUR TURN</a:t>
             </a:r>
@@ -9068,9 +9068,9 @@
             <a:r>
               <a:rPr sz="3800" b="1">
                 <a:solidFill>
-                  <a:srgbClr val="1F4D2B"/>
-                </a:solidFill>
-                <a:latin typeface="Georgia"/>
+                  <a:srgbClr val="2B2B2B"/>
+                </a:solidFill>
+                <a:latin typeface="Arial Rounded MT Bold"/>
               </a:rPr>
               <a:t>Picture quiz — again</a:t>
             </a:r>
@@ -9092,7 +9092,7 @@
             <a:avLst/>
           </a:prstGeom>
           <a:solidFill>
-            <a:srgbClr val="E2D8C4"/>
+            <a:srgbClr val="E0664A"/>
           </a:solidFill>
           <a:ln>
             <a:noFill/>
@@ -9151,9 +9151,9 @@
             <a:r>
               <a:rPr sz="3000" b="1">
                 <a:solidFill>
-                  <a:srgbClr val="20190F"/>
-                </a:solidFill>
-                <a:latin typeface="Arial"/>
+                  <a:srgbClr val="2B2B2B"/>
+                </a:solidFill>
+                <a:latin typeface="Calibri"/>
               </a:rPr>
               <a:t>•  Same cards, same corners</a:t>
             </a:r>
@@ -9167,9 +9167,9 @@
             <a:r>
               <a:rPr sz="3000" b="1">
                 <a:solidFill>
-                  <a:srgbClr val="20190F"/>
-                </a:solidFill>
-                <a:latin typeface="Arial"/>
+                  <a:srgbClr val="2B2B2B"/>
+                </a:solidFill>
+                <a:latin typeface="Calibri"/>
               </a:rPr>
               <a:t>•  What changed?</a:t>
             </a:r>
@@ -9191,11 +9191,11 @@
             <a:avLst/>
           </a:prstGeom>
           <a:solidFill>
-            <a:srgbClr val="FBF6EC"/>
+            <a:srgbClr val="FFF4E0"/>
           </a:solidFill>
           <a:ln w="15875">
             <a:solidFill>
-              <a:srgbClr val="E2D8C4"/>
+              <a:srgbClr val="E0664A"/>
             </a:solidFill>
           </a:ln>
           <a:effectLst/>
@@ -9252,9 +9252,9 @@
             <a:r>
               <a:rPr sz="1200" b="1">
                 <a:solidFill>
-                  <a:srgbClr val="C07A1E"/>
-                </a:solidFill>
-                <a:latin typeface="Arial"/>
+                  <a:srgbClr val="2A8C82"/>
+                </a:solidFill>
+                <a:latin typeface="Calibri"/>
               </a:rPr>
               <a:t>IMAGE · R-IMG-20 · coming</a:t>
             </a:r>
@@ -9291,9 +9291,9 @@
             <a:r>
               <a:rPr sz="1800" b="1">
                 <a:solidFill>
-                  <a:srgbClr val="1F4D2B"/>
-                </a:solidFill>
-                <a:latin typeface="Georgia"/>
+                  <a:srgbClr val="2B2B2B"/>
+                </a:solidFill>
+                <a:latin typeface="Arial Rounded MT Bold"/>
               </a:rPr>
               <a:t>Picture quiz cards (8 × 3)</a:t>
             </a:r>
@@ -9330,9 +9330,9 @@
             <a:r>
               <a:rPr sz="1100" b="0">
                 <a:solidFill>
-                  <a:srgbClr val="20190F"/>
-                </a:solidFill>
-                <a:latin typeface="Arial"/>
+                  <a:srgbClr val="2B2B2B"/>
+                </a:solidFill>
+                <a:latin typeface="Calibri"/>
               </a:rPr>
               <a:t>Eight A4 landscape cards, one per quiz question (README table). Each card: a small question picture on the top third, and three answer panels below marked by a **big letter A, B, C typeset by the layout** (the art itself has no letters). 1 · top: coins from a spinach sale; A: coins into a purse with other things; B: coins into a tin beside an open book;…</a:t>
             </a:r>
@@ -9353,7 +9353,7 @@
     <p:bg>
       <p:bgPr>
         <a:solidFill>
-          <a:srgbClr val="F7F2E9"/>
+          <a:srgbClr val="FFF4E0"/>
         </a:solidFill>
         <a:effectLst/>
       </p:bgPr>
@@ -9395,9 +9395,9 @@
             <a:r>
               <a:rPr sz="1000" b="0">
                 <a:solidFill>
-                  <a:srgbClr val="6B6255"/>
-                </a:solidFill>
-                <a:latin typeface="Arial"/>
+                  <a:srgbClr val="2B2B2B"/>
+                </a:solidFill>
+                <a:latin typeface="Calibri"/>
               </a:rPr>
               <a:t>R-D3-02   ·   Poster R-P14</a:t>
             </a:r>
@@ -9434,9 +9434,9 @@
             <a:r>
               <a:rPr sz="1000" b="0">
                 <a:solidFill>
-                  <a:srgbClr val="6B6255"/>
-                </a:solidFill>
-                <a:latin typeface="Arial"/>
+                  <a:srgbClr val="2B2B2B"/>
+                </a:solidFill>
+                <a:latin typeface="Calibri"/>
               </a:rPr>
               <a:t>Farmer Money</a:t>
             </a:r>
@@ -9473,9 +9473,9 @@
             <a:r>
               <a:rPr sz="3800" b="1">
                 <a:solidFill>
-                  <a:srgbClr val="1F4D2B"/>
-                </a:solidFill>
-                <a:latin typeface="Georgia"/>
+                  <a:srgbClr val="2B2B2B"/>
+                </a:solidFill>
+                <a:latin typeface="Arial Rounded MT Bold"/>
               </a:rPr>
               <a:t>Who buys?</a:t>
             </a:r>
@@ -9497,7 +9497,7 @@
             <a:avLst/>
           </a:prstGeom>
           <a:solidFill>
-            <a:srgbClr val="E2D8C4"/>
+            <a:srgbClr val="E0664A"/>
           </a:solidFill>
           <a:ln>
             <a:noFill/>
@@ -9556,9 +9556,9 @@
             <a:r>
               <a:rPr sz="2800" b="0">
                 <a:solidFill>
-                  <a:srgbClr val="20190F"/>
-                </a:solidFill>
-                <a:latin typeface="Arial"/>
+                  <a:srgbClr val="2B2B2B"/>
+                </a:solidFill>
+                <a:latin typeface="Calibri"/>
               </a:rPr>
               <a:t>•  Neighbour · spaza · hawker</a:t>
             </a:r>
@@ -9572,9 +9572,9 @@
             <a:r>
               <a:rPr sz="2800" b="0">
                 <a:solidFill>
-                  <a:srgbClr val="20190F"/>
-                </a:solidFill>
-                <a:latin typeface="Arial"/>
+                  <a:srgbClr val="2B2B2B"/>
+                </a:solidFill>
+                <a:latin typeface="Calibri"/>
               </a:rPr>
               <a:t>•  Creche kitchen · market stall</a:t>
             </a:r>
@@ -9588,9 +9588,9 @@
             <a:r>
               <a:rPr sz="2800" b="0">
                 <a:solidFill>
-                  <a:srgbClr val="20190F"/>
-                </a:solidFill>
-                <a:latin typeface="Arial"/>
+                  <a:srgbClr val="2B2B2B"/>
+                </a:solidFill>
+                <a:latin typeface="Calibri"/>
               </a:rPr>
               <a:t>•  Selling together</a:t>
             </a:r>
@@ -9612,11 +9612,11 @@
             <a:avLst/>
           </a:prstGeom>
           <a:solidFill>
-            <a:srgbClr val="FBF6EC"/>
+            <a:srgbClr val="FFF4E0"/>
           </a:solidFill>
           <a:ln w="15875">
             <a:solidFill>
-              <a:srgbClr val="E2D8C4"/>
+              <a:srgbClr val="E0664A"/>
             </a:solidFill>
           </a:ln>
           <a:effectLst/>
@@ -9673,9 +9673,9 @@
             <a:r>
               <a:rPr sz="1200" b="1">
                 <a:solidFill>
-                  <a:srgbClr val="C07A1E"/>
-                </a:solidFill>
-                <a:latin typeface="Arial"/>
+                  <a:srgbClr val="2A8C82"/>
+                </a:solidFill>
+                <a:latin typeface="Calibri"/>
               </a:rPr>
               <a:t>POSTER ART · R-P14-ART · coming</a:t>
             </a:r>
@@ -9712,9 +9712,9 @@
             <a:r>
               <a:rPr sz="1800" b="1">
                 <a:solidFill>
-                  <a:srgbClr val="1F4D2B"/>
-                </a:solidFill>
-                <a:latin typeface="Georgia"/>
+                  <a:srgbClr val="2B2B2B"/>
+                </a:solidFill>
+                <a:latin typeface="Arial Rounded MT Bold"/>
               </a:rPr>
               <a:t>Artwork for R-P14 · Who buys? What do they want?</a:t>
             </a:r>
@@ -9751,9 +9751,9 @@
             <a:r>
               <a:rPr sz="1100" b="0">
                 <a:solidFill>
-                  <a:srgbClr val="20190F"/>
-                </a:solidFill>
-                <a:latin typeface="Arial"/>
+                  <a:srgbClr val="2B2B2B"/>
+                </a:solidFill>
+                <a:latin typeface="Calibri"/>
               </a:rPr>
               <a:t>A garden gate in the centre with a woman holding a crate of even, clean bunches. Six paths lead out to: ① a neighbour at the gate with a small bag ② a spaza shop (small building with a serving hatch, crates of vegetables, no signage) ③ a hawker at a taxi rank with a wheelbarrow stall ④ a creche kitchen door with a cook and a delivery crate ⑤ a market…</a:t>
             </a:r>
@@ -9774,7 +9774,7 @@
     <p:bg>
       <p:bgPr>
         <a:solidFill>
-          <a:srgbClr val="1F4D2B"/>
+          <a:srgbClr val="4B2E4F"/>
         </a:solidFill>
         <a:effectLst/>
       </p:bgPr>
@@ -9816,9 +9816,9 @@
             <a:r>
               <a:rPr sz="1000" b="0">
                 <a:solidFill>
-                  <a:srgbClr val="A8D88A"/>
-                </a:solidFill>
-                <a:latin typeface="Arial"/>
+                  <a:srgbClr val="FFF4E0"/>
+                </a:solidFill>
+                <a:latin typeface="Calibri"/>
               </a:rPr>
               <a:t>R-D3-20</a:t>
             </a:r>
@@ -9855,9 +9855,9 @@
             <a:r>
               <a:rPr sz="1000" b="0">
                 <a:solidFill>
-                  <a:srgbClr val="A8D88A"/>
-                </a:solidFill>
-                <a:latin typeface="Arial"/>
+                  <a:srgbClr val="FFF4E0"/>
+                </a:solidFill>
+                <a:latin typeface="Calibri"/>
               </a:rPr>
               <a:t>Farmer Money</a:t>
             </a:r>
@@ -9894,9 +9894,9 @@
             <a:r>
               <a:rPr sz="4800" b="1">
                 <a:solidFill>
-                  <a:srgbClr val="F7F2E9"/>
-                </a:solidFill>
-                <a:latin typeface="Georgia"/>
+                  <a:srgbClr val="FFF4E0"/>
+                </a:solidFill>
+                <a:latin typeface="Arial Rounded MT Bold"/>
               </a:rPr>
               <a:t>Certificates</a:t>
             </a:r>
@@ -9918,7 +9918,7 @@
             <a:avLst/>
           </a:prstGeom>
           <a:solidFill>
-            <a:srgbClr val="C07A1E"/>
+            <a:srgbClr val="2A8C82"/>
           </a:solidFill>
           <a:ln>
             <a:noFill/>
@@ -9977,9 +9977,9 @@
             <a:r>
               <a:rPr sz="2400" b="0">
                 <a:solidFill>
-                  <a:srgbClr val="A8D88A"/>
-                </a:solidFill>
-                <a:latin typeface="Arial"/>
+                  <a:srgbClr val="FFF4E0"/>
+                </a:solidFill>
+                <a:latin typeface="Calibri"/>
               </a:rPr>
               <a:t>Farmer Money</a:t>
             </a:r>
@@ -9993,9 +9993,9 @@
             <a:r>
               <a:rPr sz="2400" b="0">
                 <a:solidFill>
-                  <a:srgbClr val="A8D88A"/>
-                </a:solidFill>
-                <a:latin typeface="Arial"/>
+                  <a:srgbClr val="FFF4E0"/>
+                </a:solidFill>
+                <a:latin typeface="Calibri"/>
               </a:rPr>
               <a:t>Well done</a:t>
             </a:r>
@@ -10017,11 +10017,11 @@
             <a:avLst/>
           </a:prstGeom>
           <a:solidFill>
-            <a:srgbClr val="FBF6EC"/>
+            <a:srgbClr val="FFF4E0"/>
           </a:solidFill>
           <a:ln w="15875">
             <a:solidFill>
-              <a:srgbClr val="E2D8C4"/>
+              <a:srgbClr val="E0664A"/>
             </a:solidFill>
           </a:ln>
           <a:effectLst/>
@@ -10078,9 +10078,9 @@
             <a:r>
               <a:rPr sz="1200" b="1">
                 <a:solidFill>
-                  <a:srgbClr val="C07A1E"/>
-                </a:solidFill>
-                <a:latin typeface="Arial"/>
+                  <a:srgbClr val="2A8C82"/>
+                </a:solidFill>
+                <a:latin typeface="Calibri"/>
               </a:rPr>
               <a:t>IMAGE · R-IMG-01 · coming</a:t>
             </a:r>
@@ -10117,9 +10117,9 @@
             <a:r>
               <a:rPr sz="1800" b="1">
                 <a:solidFill>
-                  <a:srgbClr val="1F4D2B"/>
-                </a:solidFill>
-                <a:latin typeface="Georgia"/>
+                  <a:srgbClr val="2B2B2B"/>
+                </a:solidFill>
+                <a:latin typeface="Arial Rounded MT Bold"/>
               </a:rPr>
               <a:t>The three families</a:t>
             </a:r>
@@ -10156,9 +10156,9 @@
             <a:r>
               <a:rPr sz="1100" b="0">
                 <a:solidFill>
-                  <a:srgbClr val="20190F"/>
-                </a:solidFill>
-                <a:latin typeface="Arial"/>
+                  <a:srgbClr val="2B2B2B"/>
+                </a:solidFill>
+                <a:latin typeface="Calibri"/>
               </a:rPr>
               <a:t>Three side-by-side scenes, equal width, one per family, same style, a thin Hairline divider between them. **Left — the Dlamini household (rural KZN):** a rondavel and a small block house on a green hillside; a 2 500 ℓ plastic water tank beside the house; trench beds with leafy greens, cabbages and a row of maize. A grandmother (70s, headscarf, cardigan)…</a:t>
             </a:r>
@@ -10179,7 +10179,7 @@
     <p:bg>
       <p:bgPr>
         <a:solidFill>
-          <a:srgbClr val="F7F2E9"/>
+          <a:srgbClr val="FFF4E0"/>
         </a:solidFill>
         <a:effectLst/>
       </p:bgPr>
@@ -10221,9 +10221,9 @@
             <a:r>
               <a:rPr sz="1000" b="0">
                 <a:solidFill>
-                  <a:srgbClr val="6B6255"/>
-                </a:solidFill>
-                <a:latin typeface="Arial"/>
+                  <a:srgbClr val="2B2B2B"/>
+                </a:solidFill>
+                <a:latin typeface="Calibri"/>
               </a:rPr>
               <a:t>R-D3-03</a:t>
             </a:r>
@@ -10260,9 +10260,9 @@
             <a:r>
               <a:rPr sz="1000" b="0">
                 <a:solidFill>
-                  <a:srgbClr val="6B6255"/>
-                </a:solidFill>
-                <a:latin typeface="Arial"/>
+                  <a:srgbClr val="2B2B2B"/>
+                </a:solidFill>
+                <a:latin typeface="Calibri"/>
               </a:rPr>
               <a:t>Farmer Money</a:t>
             </a:r>
@@ -10284,7 +10284,7 @@
             <a:avLst/>
           </a:prstGeom>
           <a:solidFill>
-            <a:srgbClr val="C07A1E"/>
+            <a:srgbClr val="2A8C82"/>
           </a:solidFill>
           <a:ln>
             <a:noFill/>
@@ -10343,9 +10343,9 @@
             <a:r>
               <a:rPr sz="1400" b="1">
                 <a:solidFill>
-                  <a:srgbClr val="F7F2E9"/>
-                </a:solidFill>
-                <a:latin typeface="Arial"/>
+                  <a:srgbClr val="FFF4E0"/>
+                </a:solidFill>
+                <a:latin typeface="Calibri"/>
               </a:rPr>
               <a:t>YOUR TURN</a:t>
             </a:r>
@@ -10382,9 +10382,9 @@
             <a:r>
               <a:rPr sz="3800" b="1">
                 <a:solidFill>
-                  <a:srgbClr val="1F4D2B"/>
-                </a:solidFill>
-                <a:latin typeface="Georgia"/>
+                  <a:srgbClr val="2B2B2B"/>
+                </a:solidFill>
+                <a:latin typeface="Arial Rounded MT Bold"/>
               </a:rPr>
               <a:t>The best buyer for our family</a:t>
             </a:r>
@@ -10406,7 +10406,7 @@
             <a:avLst/>
           </a:prstGeom>
           <a:solidFill>
-            <a:srgbClr val="E2D8C4"/>
+            <a:srgbClr val="E0664A"/>
           </a:solidFill>
           <a:ln>
             <a:noFill/>
@@ -10465,9 +10465,9 @@
             <a:r>
               <a:rPr sz="3000" b="1">
                 <a:solidFill>
-                  <a:srgbClr val="20190F"/>
-                </a:solidFill>
-                <a:latin typeface="Arial"/>
+                  <a:srgbClr val="2B2B2B"/>
+                </a:solidFill>
+                <a:latin typeface="Calibri"/>
               </a:rPr>
               <a:t>•  Six buyer cards</a:t>
             </a:r>
@@ -10481,9 +10481,9 @@
             <a:r>
               <a:rPr sz="3000" b="1">
                 <a:solidFill>
-                  <a:srgbClr val="20190F"/>
-                </a:solidFill>
-                <a:latin typeface="Arial"/>
+                  <a:srgbClr val="2B2B2B"/>
+                </a:solidFill>
+                <a:latin typeface="Calibri"/>
               </a:rPr>
               <a:t>•  Put them in order, best on top</a:t>
             </a:r>
@@ -10497,9 +10497,9 @@
             <a:r>
               <a:rPr sz="3000" b="1">
                 <a:solidFill>
-                  <a:srgbClr val="20190F"/>
-                </a:solidFill>
-                <a:latin typeface="Arial"/>
+                  <a:srgbClr val="2B2B2B"/>
+                </a:solidFill>
+                <a:latin typeface="Calibri"/>
               </a:rPr>
               <a:t>•  Say why (15 min)</a:t>
             </a:r>
@@ -10521,11 +10521,11 @@
             <a:avLst/>
           </a:prstGeom>
           <a:solidFill>
-            <a:srgbClr val="FBF6EC"/>
+            <a:srgbClr val="FFF4E0"/>
           </a:solidFill>
           <a:ln w="15875">
             <a:solidFill>
-              <a:srgbClr val="E2D8C4"/>
+              <a:srgbClr val="E0664A"/>
             </a:solidFill>
           </a:ln>
           <a:effectLst/>
@@ -10582,9 +10582,9 @@
             <a:r>
               <a:rPr sz="1200" b="1">
                 <a:solidFill>
-                  <a:srgbClr val="C07A1E"/>
-                </a:solidFill>
-                <a:latin typeface="Arial"/>
+                  <a:srgbClr val="2A8C82"/>
+                </a:solidFill>
+                <a:latin typeface="Calibri"/>
               </a:rPr>
               <a:t>IMAGE · R-IMG-10 · coming</a:t>
             </a:r>
@@ -10621,9 +10621,9 @@
             <a:r>
               <a:rPr sz="1800" b="1">
                 <a:solidFill>
-                  <a:srgbClr val="1F4D2B"/>
-                </a:solidFill>
-                <a:latin typeface="Georgia"/>
+                  <a:srgbClr val="2B2B2B"/>
+                </a:solidFill>
+                <a:latin typeface="Arial Rounded MT Bold"/>
               </a:rPr>
               <a:t>Buyer cards (6)</a:t>
             </a:r>
@@ -10660,9 +10660,9 @@
             <a:r>
               <a:rPr sz="1100" b="0">
                 <a:solidFill>
-                  <a:srgbClr val="20190F"/>
-                </a:solidFill>
-                <a:latin typeface="Arial"/>
+                  <a:srgbClr val="2B2B2B"/>
+                </a:solidFill>
+                <a:latin typeface="Calibri"/>
               </a:rPr>
               <a:t>A4 sheet, 6 cards (2 × 3), each one buyer, no text (facts on the backs — printables P16): 1 a neighbour at a garden gate with a shopping bag · 2 a spaza shop hatch with a shopkeeper and crates (no signage) · 3 a hawker with a wheelbarrow stall at a taxi rank · 4 a creche cook at a kitchen door with a delivery crate · 5 a market stall under an awning with…</a:t>
             </a:r>
@@ -10683,7 +10683,7 @@
     <p:bg>
       <p:bgPr>
         <a:solidFill>
-          <a:srgbClr val="F7F2E9"/>
+          <a:srgbClr val="FFF4E0"/>
         </a:solidFill>
         <a:effectLst/>
       </p:bgPr>
@@ -10725,9 +10725,9 @@
             <a:r>
               <a:rPr sz="1000" b="0">
                 <a:solidFill>
-                  <a:srgbClr val="6B6255"/>
-                </a:solidFill>
-                <a:latin typeface="Arial"/>
+                  <a:srgbClr val="2B2B2B"/>
+                </a:solidFill>
+                <a:latin typeface="Calibri"/>
               </a:rPr>
               <a:t>R-D3-04   ·   Poster R-P14</a:t>
             </a:r>
@@ -10764,9 +10764,9 @@
             <a:r>
               <a:rPr sz="1000" b="0">
                 <a:solidFill>
-                  <a:srgbClr val="6B6255"/>
-                </a:solidFill>
-                <a:latin typeface="Arial"/>
+                  <a:srgbClr val="2B2B2B"/>
+                </a:solidFill>
+                <a:latin typeface="Calibri"/>
               </a:rPr>
               <a:t>Farmer Money</a:t>
             </a:r>
@@ -10803,9 +10803,9 @@
             <a:r>
               <a:rPr sz="3800" b="1">
                 <a:solidFill>
-                  <a:srgbClr val="1F4D2B"/>
-                </a:solidFill>
-                <a:latin typeface="Georgia"/>
+                  <a:srgbClr val="2B2B2B"/>
+                </a:solidFill>
+                <a:latin typeface="Arial Rounded MT Bold"/>
               </a:rPr>
               <a:t>Quality is price</a:t>
             </a:r>
@@ -10827,7 +10827,7 @@
             <a:avLst/>
           </a:prstGeom>
           <a:solidFill>
-            <a:srgbClr val="E2D8C4"/>
+            <a:srgbClr val="E0664A"/>
           </a:solidFill>
           <a:ln>
             <a:noFill/>
@@ -10886,9 +10886,9 @@
             <a:r>
               <a:rPr sz="2800" b="0">
                 <a:solidFill>
-                  <a:srgbClr val="20190F"/>
-                </a:solidFill>
-                <a:latin typeface="Arial"/>
+                  <a:srgbClr val="2B2B2B"/>
+                </a:solidFill>
+                <a:latin typeface="Calibri"/>
               </a:rPr>
               <a:t>•  Picked early · cool · clean</a:t>
             </a:r>
@@ -10902,9 +10902,9 @@
             <a:r>
               <a:rPr sz="2800" b="0">
                 <a:solidFill>
-                  <a:srgbClr val="20190F"/>
-                </a:solidFill>
-                <a:latin typeface="Arial"/>
+                  <a:srgbClr val="2B2B2B"/>
+                </a:solidFill>
+                <a:latin typeface="Calibri"/>
               </a:rPr>
               <a:t>•  Same size · same every week</a:t>
             </a:r>
@@ -10918,9 +10918,9 @@
             <a:r>
               <a:rPr sz="2800" b="0">
                 <a:solidFill>
-                  <a:srgbClr val="20190F"/>
-                </a:solidFill>
-                <a:latin typeface="Arial"/>
+                  <a:srgbClr val="2B2B2B"/>
+                </a:solidFill>
+                <a:latin typeface="Calibri"/>
               </a:rPr>
               <a:t>•  On time</a:t>
             </a:r>
@@ -10942,11 +10942,11 @@
             <a:avLst/>
           </a:prstGeom>
           <a:solidFill>
-            <a:srgbClr val="FBF6EC"/>
+            <a:srgbClr val="FFF4E0"/>
           </a:solidFill>
           <a:ln w="15875">
             <a:solidFill>
-              <a:srgbClr val="E2D8C4"/>
+              <a:srgbClr val="E0664A"/>
             </a:solidFill>
           </a:ln>
           <a:effectLst/>
@@ -11003,9 +11003,9 @@
             <a:r>
               <a:rPr sz="1200" b="1">
                 <a:solidFill>
-                  <a:srgbClr val="C07A1E"/>
-                </a:solidFill>
-                <a:latin typeface="Arial"/>
+                  <a:srgbClr val="2A8C82"/>
+                </a:solidFill>
+                <a:latin typeface="Calibri"/>
               </a:rPr>
               <a:t>IMAGE · R-IMG-08 · coming</a:t>
             </a:r>
@@ -11042,9 +11042,9 @@
             <a:r>
               <a:rPr sz="1800" b="1">
                 <a:solidFill>
-                  <a:srgbClr val="1F4D2B"/>
-                </a:solidFill>
-                <a:latin typeface="Georgia"/>
+                  <a:srgbClr val="2B2B2B"/>
+                </a:solidFill>
+                <a:latin typeface="Arial Rounded MT Bold"/>
               </a:rPr>
               <a:t>Good bunch, bad bunch</a:t>
             </a:r>
@@ -11081,9 +11081,9 @@
             <a:r>
               <a:rPr sz="1100" b="0">
                 <a:solidFill>
-                  <a:srgbClr val="20190F"/>
-                </a:solidFill>
-                <a:latin typeface="Arial"/>
+                  <a:srgbClr val="2B2B2B"/>
+                </a:solidFill>
+                <a:latin typeface="Calibri"/>
               </a:rPr>
               <a:t>Two bunches of leafy greens side by side on a plank. **Left (good):** fresh, upright, clean, deep green, even leaf size, neatly tied with a band, in the shade of a crate. **Right (bad):** wilted, soil on the stems, yellow and holed leaves, mixed sizes, loosely tied, lying in the sun. A small tick-shaped leaf above the left and a drooping leaf above the…</a:t>
             </a:r>
@@ -11104,7 +11104,7 @@
     <p:bg>
       <p:bgPr>
         <a:solidFill>
-          <a:srgbClr val="F7F2E9"/>
+          <a:srgbClr val="FFF4E0"/>
         </a:solidFill>
         <a:effectLst/>
       </p:bgPr>
@@ -11146,9 +11146,9 @@
             <a:r>
               <a:rPr sz="1000" b="0">
                 <a:solidFill>
-                  <a:srgbClr val="6B6255"/>
-                </a:solidFill>
-                <a:latin typeface="Arial"/>
+                  <a:srgbClr val="2B2B2B"/>
+                </a:solidFill>
+                <a:latin typeface="Calibri"/>
               </a:rPr>
               <a:t>R-D3-05   ·   Poster R-P14</a:t>
             </a:r>
@@ -11185,9 +11185,9 @@
             <a:r>
               <a:rPr sz="1000" b="0">
                 <a:solidFill>
-                  <a:srgbClr val="6B6255"/>
-                </a:solidFill>
-                <a:latin typeface="Arial"/>
+                  <a:srgbClr val="2B2B2B"/>
+                </a:solidFill>
+                <a:latin typeface="Calibri"/>
               </a:rPr>
               <a:t>Farmer Money</a:t>
             </a:r>
@@ -11224,9 +11224,9 @@
             <a:r>
               <a:rPr sz="3800" b="1">
                 <a:solidFill>
-                  <a:srgbClr val="1F4D2B"/>
-                </a:solidFill>
-                <a:latin typeface="Georgia"/>
+                  <a:srgbClr val="2B2B2B"/>
+                </a:solidFill>
+                <a:latin typeface="Arial Rounded MT Bold"/>
               </a:rPr>
               <a:t>Selling together</a:t>
             </a:r>
@@ -11248,7 +11248,7 @@
             <a:avLst/>
           </a:prstGeom>
           <a:solidFill>
-            <a:srgbClr val="E2D8C4"/>
+            <a:srgbClr val="E0664A"/>
           </a:solidFill>
           <a:ln>
             <a:noFill/>
@@ -11307,9 +11307,9 @@
             <a:r>
               <a:rPr sz="2800" b="0">
                 <a:solidFill>
-                  <a:srgbClr val="20190F"/>
-                </a:solidFill>
-                <a:latin typeface="Arial"/>
+                  <a:srgbClr val="2B2B2B"/>
+                </a:solidFill>
+                <a:latin typeface="Calibri"/>
               </a:rPr>
               <a:t>•  Five growers, one big order</a:t>
             </a:r>
@@ -11323,9 +11323,9 @@
             <a:r>
               <a:rPr sz="2800" b="0">
                 <a:solidFill>
-                  <a:srgbClr val="20190F"/>
-                </a:solidFill>
-                <a:latin typeface="Arial"/>
+                  <a:srgbClr val="2B2B2B"/>
+                </a:solidFill>
+                <a:latin typeface="Calibri"/>
               </a:rPr>
               <a:t>•  One taxi, shared cost</a:t>
             </a:r>
@@ -11339,9 +11339,9 @@
             <a:r>
               <a:rPr sz="2800" b="0">
                 <a:solidFill>
-                  <a:srgbClr val="20190F"/>
-                </a:solidFill>
-                <a:latin typeface="Arial"/>
+                  <a:srgbClr val="2B2B2B"/>
+                </a:solidFill>
+                <a:latin typeface="Calibri"/>
               </a:rPr>
               <a:t>•  Clear records for every member</a:t>
             </a:r>
@@ -11386,7 +11386,7 @@
     <p:bg>
       <p:bgPr>
         <a:solidFill>
-          <a:srgbClr val="1F4D2B"/>
+          <a:srgbClr val="4B2E4F"/>
         </a:solidFill>
         <a:effectLst/>
       </p:bgPr>
@@ -11428,9 +11428,9 @@
             <a:r>
               <a:rPr sz="1000" b="0">
                 <a:solidFill>
-                  <a:srgbClr val="A8D88A"/>
-                </a:solidFill>
-                <a:latin typeface="Arial"/>
+                  <a:srgbClr val="FFF4E0"/>
+                </a:solidFill>
+                <a:latin typeface="Calibri"/>
               </a:rPr>
               <a:t>R-D3-06   ·   Poster R-P15</a:t>
             </a:r>
@@ -11467,9 +11467,9 @@
             <a:r>
               <a:rPr sz="1000" b="0">
                 <a:solidFill>
-                  <a:srgbClr val="A8D88A"/>
-                </a:solidFill>
-                <a:latin typeface="Arial"/>
+                  <a:srgbClr val="FFF4E0"/>
+                </a:solidFill>
+                <a:latin typeface="Calibri"/>
               </a:rPr>
               <a:t>Farmer Money</a:t>
             </a:r>
@@ -11506,9 +11506,9 @@
             <a:r>
               <a:rPr sz="4800" b="1">
                 <a:solidFill>
-                  <a:srgbClr val="F7F2E9"/>
-                </a:solidFill>
-                <a:latin typeface="Georgia"/>
+                  <a:srgbClr val="FFF4E0"/>
+                </a:solidFill>
+                <a:latin typeface="Arial Rounded MT Bold"/>
               </a:rPr>
               <a:t>Market day</a:t>
             </a:r>
@@ -11530,7 +11530,7 @@
             <a:avLst/>
           </a:prstGeom>
           <a:solidFill>
-            <a:srgbClr val="C07A1E"/>
+            <a:srgbClr val="2A8C82"/>
           </a:solidFill>
           <a:ln>
             <a:noFill/>
@@ -11589,9 +11589,9 @@
             <a:r>
               <a:rPr sz="2400" b="0">
                 <a:solidFill>
-                  <a:srgbClr val="A8D88A"/>
-                </a:solidFill>
-                <a:latin typeface="Arial"/>
+                  <a:srgbClr val="FFF4E0"/>
+                </a:solidFill>
+                <a:latin typeface="Calibri"/>
               </a:rPr>
               <a:t>From order to receipt</a:t>
             </a:r>
@@ -11613,11 +11613,11 @@
             <a:avLst/>
           </a:prstGeom>
           <a:solidFill>
-            <a:srgbClr val="FBF6EC"/>
+            <a:srgbClr val="FFF4E0"/>
           </a:solidFill>
           <a:ln w="15875">
             <a:solidFill>
-              <a:srgbClr val="E2D8C4"/>
+              <a:srgbClr val="E0664A"/>
             </a:solidFill>
           </a:ln>
           <a:effectLst/>
@@ -11674,9 +11674,9 @@
             <a:r>
               <a:rPr sz="1200" b="1">
                 <a:solidFill>
-                  <a:srgbClr val="C07A1E"/>
-                </a:solidFill>
-                <a:latin typeface="Arial"/>
+                  <a:srgbClr val="2A8C82"/>
+                </a:solidFill>
+                <a:latin typeface="Calibri"/>
               </a:rPr>
               <a:t>IMAGE · R-IMG-05 · coming</a:t>
             </a:r>
@@ -11713,9 +11713,9 @@
             <a:r>
               <a:rPr sz="1800" b="1">
                 <a:solidFill>
-                  <a:srgbClr val="1F4D2B"/>
-                </a:solidFill>
-                <a:latin typeface="Georgia"/>
+                  <a:srgbClr val="2B2B2B"/>
+                </a:solidFill>
+                <a:latin typeface="Arial Rounded MT Bold"/>
               </a:rPr>
               <a:t>Market day</a:t>
             </a:r>
@@ -11752,9 +11752,9 @@
             <a:r>
               <a:rPr sz="1100" b="0">
                 <a:solidFill>
-                  <a:srgbClr val="20190F"/>
-                </a:solidFill>
-                <a:latin typeface="Arial"/>
+                  <a:srgbClr val="2B2B2B"/>
+                </a:solidFill>
+                <a:latin typeface="Calibri"/>
               </a:rPr>
               <a:t>A busy but friendly informal market scene at a taxi rank on a sunny morning (sun in the north). In the foreground a young woman grower hands a crate of even, clean bunches of greens to a creche cook in an apron, who counts them; the grower holds a small duplicate book and pen. Middle ground: a hawker's wheelbarrow stall with greens and tomatoes; a spaza…</a:t>
             </a:r>
@@ -11775,7 +11775,7 @@
     <p:bg>
       <p:bgPr>
         <a:solidFill>
-          <a:srgbClr val="F7F2E9"/>
+          <a:srgbClr val="FFF4E0"/>
         </a:solidFill>
         <a:effectLst/>
       </p:bgPr>
@@ -11817,9 +11817,9 @@
             <a:r>
               <a:rPr sz="1000" b="0">
                 <a:solidFill>
-                  <a:srgbClr val="6B6255"/>
-                </a:solidFill>
-                <a:latin typeface="Arial"/>
+                  <a:srgbClr val="2B2B2B"/>
+                </a:solidFill>
+                <a:latin typeface="Calibri"/>
               </a:rPr>
               <a:t>R-D3-07   ·   Poster R-P15</a:t>
             </a:r>
@@ -11856,9 +11856,9 @@
             <a:r>
               <a:rPr sz="1000" b="0">
                 <a:solidFill>
-                  <a:srgbClr val="6B6255"/>
-                </a:solidFill>
-                <a:latin typeface="Arial"/>
+                  <a:srgbClr val="2B2B2B"/>
+                </a:solidFill>
+                <a:latin typeface="Calibri"/>
               </a:rPr>
               <a:t>Farmer Money</a:t>
             </a:r>
@@ -11895,9 +11895,9 @@
             <a:r>
               <a:rPr sz="3800" b="1">
                 <a:solidFill>
-                  <a:srgbClr val="1F4D2B"/>
-                </a:solidFill>
-                <a:latin typeface="Georgia"/>
+                  <a:srgbClr val="2B2B2B"/>
+                </a:solidFill>
+                <a:latin typeface="Arial Rounded MT Bold"/>
               </a:rPr>
               <a:t>Five steps, five proofs</a:t>
             </a:r>
@@ -11919,7 +11919,7 @@
             <a:avLst/>
           </a:prstGeom>
           <a:solidFill>
-            <a:srgbClr val="E2D8C4"/>
+            <a:srgbClr val="E0664A"/>
           </a:solidFill>
           <a:ln>
             <a:noFill/>
@@ -11978,9 +11978,9 @@
             <a:r>
               <a:rPr sz="2800" b="0">
                 <a:solidFill>
-                  <a:srgbClr val="20190F"/>
-                </a:solidFill>
-                <a:latin typeface="Arial"/>
+                  <a:srgbClr val="2B2B2B"/>
+                </a:solidFill>
+                <a:latin typeface="Calibri"/>
               </a:rPr>
               <a:t>•  Order → deliver → invoice</a:t>
             </a:r>
@@ -11994,9 +11994,9 @@
             <a:r>
               <a:rPr sz="2800" b="0">
                 <a:solidFill>
-                  <a:srgbClr val="20190F"/>
-                </a:solidFill>
-                <a:latin typeface="Arial"/>
+                  <a:srgbClr val="2B2B2B"/>
+                </a:solidFill>
+                <a:latin typeface="Calibri"/>
               </a:rPr>
               <a:t>•  Paid → receipt</a:t>
             </a:r>
@@ -12010,9 +12010,9 @@
             <a:r>
               <a:rPr sz="2800" b="0">
                 <a:solidFill>
-                  <a:srgbClr val="20190F"/>
-                </a:solidFill>
-                <a:latin typeface="Arial"/>
+                  <a:srgbClr val="2B2B2B"/>
+                </a:solidFill>
+                <a:latin typeface="Calibri"/>
               </a:rPr>
               <a:t>•  Each paper proves one step</a:t>
             </a:r>
@@ -12034,11 +12034,11 @@
             <a:avLst/>
           </a:prstGeom>
           <a:solidFill>
-            <a:srgbClr val="FBF6EC"/>
+            <a:srgbClr val="FFF4E0"/>
           </a:solidFill>
           <a:ln w="15875">
             <a:solidFill>
-              <a:srgbClr val="E2D8C4"/>
+              <a:srgbClr val="E0664A"/>
             </a:solidFill>
           </a:ln>
           <a:effectLst/>
@@ -12095,9 +12095,9 @@
             <a:r>
               <a:rPr sz="1200" b="1">
                 <a:solidFill>
-                  <a:srgbClr val="C07A1E"/>
-                </a:solidFill>
-                <a:latin typeface="Arial"/>
+                  <a:srgbClr val="2A8C82"/>
+                </a:solidFill>
+                <a:latin typeface="Calibri"/>
               </a:rPr>
               <a:t>ANIMATION · R-ANI-03 · coming</a:t>
             </a:r>
@@ -12134,9 +12134,9 @@
             <a:r>
               <a:rPr sz="1800" b="1">
                 <a:solidFill>
-                  <a:srgbClr val="1F4D2B"/>
-                </a:solidFill>
-                <a:latin typeface="Georgia"/>
+                  <a:srgbClr val="2B2B2B"/>
+                </a:solidFill>
+                <a:latin typeface="Arial Rounded MT Bold"/>
               </a:rPr>
               <a:t>From order to receipt</a:t>
             </a:r>
@@ -12173,9 +12173,9 @@
             <a:r>
               <a:rPr sz="1100" b="0">
                 <a:solidFill>
-                  <a:srgbClr val="20190F"/>
-                </a:solidFill>
-                <a:latin typeface="Arial"/>
+                  <a:srgbClr val="2B2B2B"/>
+                </a:solidFill>
+                <a:latin typeface="Calibri"/>
               </a:rPr>
               <a:t>Five beats, 5 s each, same two characters (a young woman grower, a creche cook). 1 Phone order: two phones, a speech bubble with a bunch icon and a crate icon. 2 Delivery: the grower hands a crate; the cook counts bunches one by one (a tally appears as dots) and signs a paper. 3 Invoice: the grower tears the top copy from a book and hands it over; the…</a:t>
             </a:r>
@@ -12196,7 +12196,7 @@
     <p:bg>
       <p:bgPr>
         <a:solidFill>
-          <a:srgbClr val="F7F2E9"/>
+          <a:srgbClr val="FFF4E0"/>
         </a:solidFill>
         <a:effectLst/>
       </p:bgPr>
@@ -12238,9 +12238,9 @@
             <a:r>
               <a:rPr sz="1000" b="0">
                 <a:solidFill>
-                  <a:srgbClr val="6B6255"/>
-                </a:solidFill>
-                <a:latin typeface="Arial"/>
+                  <a:srgbClr val="2B2B2B"/>
+                </a:solidFill>
+                <a:latin typeface="Calibri"/>
               </a:rPr>
               <a:t>R-D3-08</a:t>
             </a:r>
@@ -12277,9 +12277,9 @@
             <a:r>
               <a:rPr sz="1000" b="0">
                 <a:solidFill>
-                  <a:srgbClr val="6B6255"/>
-                </a:solidFill>
-                <a:latin typeface="Arial"/>
+                  <a:srgbClr val="2B2B2B"/>
+                </a:solidFill>
+                <a:latin typeface="Calibri"/>
               </a:rPr>
               <a:t>Farmer Money</a:t>
             </a:r>
@@ -12301,7 +12301,7 @@
             <a:avLst/>
           </a:prstGeom>
           <a:solidFill>
-            <a:srgbClr val="C07A1E"/>
+            <a:srgbClr val="2A8C82"/>
           </a:solidFill>
           <a:ln>
             <a:noFill/>
@@ -12360,9 +12360,9 @@
             <a:r>
               <a:rPr sz="1400" b="1">
                 <a:solidFill>
-                  <a:srgbClr val="F7F2E9"/>
-                </a:solidFill>
-                <a:latin typeface="Arial"/>
+                  <a:srgbClr val="FFF4E0"/>
+                </a:solidFill>
+                <a:latin typeface="Calibri"/>
               </a:rPr>
               <a:t>YOUR TURN</a:t>
             </a:r>
@@ -12399,9 +12399,9 @@
             <a:r>
               <a:rPr sz="3800" b="1">
                 <a:solidFill>
-                  <a:srgbClr val="1F4D2B"/>
-                </a:solidFill>
-                <a:latin typeface="Georgia"/>
+                  <a:srgbClr val="2B2B2B"/>
+                </a:solidFill>
+                <a:latin typeface="Arial Rounded MT Bold"/>
               </a:rPr>
               <a:t>Market day role-play</a:t>
             </a:r>
@@ -12423,7 +12423,7 @@
             <a:avLst/>
           </a:prstGeom>
           <a:solidFill>
-            <a:srgbClr val="E2D8C4"/>
+            <a:srgbClr val="E0664A"/>
           </a:solidFill>
           <a:ln>
             <a:noFill/>
@@ -12482,9 +12482,9 @@
             <a:r>
               <a:rPr sz="3000" b="1">
                 <a:solidFill>
-                  <a:srgbClr val="20190F"/>
-                </a:solidFill>
-                <a:latin typeface="Arial"/>
+                  <a:srgbClr val="2B2B2B"/>
+                </a:solidFill>
+                <a:latin typeface="Calibri"/>
               </a:rPr>
               <a:t>•  Round 1: 3 sellers, 3 buyers</a:t>
             </a:r>
@@ -12498,9 +12498,9 @@
             <a:r>
               <a:rPr sz="3000" b="1">
                 <a:solidFill>
-                  <a:srgbClr val="20190F"/>
-                </a:solidFill>
-                <a:latin typeface="Arial"/>
+                  <a:srgbClr val="2B2B2B"/>
+                </a:solidFill>
+                <a:latin typeface="Calibri"/>
               </a:rPr>
               <a:t>•  Follow your role card</a:t>
             </a:r>
@@ -12514,9 +12514,9 @@
             <a:r>
               <a:rPr sz="3000" b="1">
                 <a:solidFill>
-                  <a:srgbClr val="20190F"/>
-                </a:solidFill>
-                <a:latin typeface="Arial"/>
+                  <a:srgbClr val="2B2B2B"/>
+                </a:solidFill>
+                <a:latin typeface="Calibri"/>
               </a:rPr>
               <a:t>•  Swap for round 2 (20 + 20 min)</a:t>
             </a:r>
@@ -12538,11 +12538,11 @@
             <a:avLst/>
           </a:prstGeom>
           <a:solidFill>
-            <a:srgbClr val="FBF6EC"/>
+            <a:srgbClr val="FFF4E0"/>
           </a:solidFill>
           <a:ln w="15875">
             <a:solidFill>
-              <a:srgbClr val="E2D8C4"/>
+              <a:srgbClr val="E0664A"/>
             </a:solidFill>
           </a:ln>
           <a:effectLst/>
@@ -12599,9 +12599,9 @@
             <a:r>
               <a:rPr sz="1200" b="1">
                 <a:solidFill>
-                  <a:srgbClr val="C07A1E"/>
-                </a:solidFill>
-                <a:latin typeface="Arial"/>
+                  <a:srgbClr val="2A8C82"/>
+                </a:solidFill>
+                <a:latin typeface="Calibri"/>
               </a:rPr>
               <a:t>IMAGE · R-IMG-05 · coming</a:t>
             </a:r>
@@ -12638,9 +12638,9 @@
             <a:r>
               <a:rPr sz="1800" b="1">
                 <a:solidFill>
-                  <a:srgbClr val="1F4D2B"/>
-                </a:solidFill>
-                <a:latin typeface="Georgia"/>
+                  <a:srgbClr val="2B2B2B"/>
+                </a:solidFill>
+                <a:latin typeface="Arial Rounded MT Bold"/>
               </a:rPr>
               <a:t>Market day</a:t>
             </a:r>
@@ -12677,9 +12677,9 @@
             <a:r>
               <a:rPr sz="1100" b="0">
                 <a:solidFill>
-                  <a:srgbClr val="20190F"/>
-                </a:solidFill>
-                <a:latin typeface="Arial"/>
+                  <a:srgbClr val="2B2B2B"/>
+                </a:solidFill>
+                <a:latin typeface="Calibri"/>
               </a:rPr>
               <a:t>A busy but friendly informal market scene at a taxi rank on a sunny morning (sun in the north). In the foreground a young woman grower hands a crate of even, clean bunches of greens to a creche cook in an apron, who counts them; the grower holds a small duplicate book and pen. Middle ground: a hawker's wheelbarrow stall with greens and tomatoes; a spaza…</a:t>
             </a:r>
@@ -12700,7 +12700,7 @@
     <p:bg>
       <p:bgPr>
         <a:solidFill>
-          <a:srgbClr val="F7F2E9"/>
+          <a:srgbClr val="FFF4E0"/>
         </a:solidFill>
         <a:effectLst/>
       </p:bgPr>
@@ -12742,9 +12742,9 @@
             <a:r>
               <a:rPr sz="1000" b="0">
                 <a:solidFill>
-                  <a:srgbClr val="6B6255"/>
-                </a:solidFill>
-                <a:latin typeface="Arial"/>
+                  <a:srgbClr val="2B2B2B"/>
+                </a:solidFill>
+                <a:latin typeface="Calibri"/>
               </a:rPr>
               <a:t>R-D3-09   ·   Poster R-P15</a:t>
             </a:r>
@@ -12781,9 +12781,9 @@
             <a:r>
               <a:rPr sz="1000" b="0">
                 <a:solidFill>
-                  <a:srgbClr val="6B6255"/>
-                </a:solidFill>
-                <a:latin typeface="Arial"/>
+                  <a:srgbClr val="2B2B2B"/>
+                </a:solidFill>
+                <a:latin typeface="Calibri"/>
               </a:rPr>
               <a:t>Farmer Money</a:t>
             </a:r>
@@ -12820,9 +12820,9 @@
             <a:r>
               <a:rPr sz="3800" b="1">
                 <a:solidFill>
-                  <a:srgbClr val="1F4D2B"/>
-                </a:solidFill>
-                <a:latin typeface="Georgia"/>
+                  <a:srgbClr val="2B2B2B"/>
+                </a:solidFill>
+                <a:latin typeface="Arial Rounded MT Bold"/>
               </a:rPr>
               <a:t>Money owed</a:t>
             </a:r>
@@ -12844,7 +12844,7 @@
             <a:avLst/>
           </a:prstGeom>
           <a:solidFill>
-            <a:srgbClr val="E2D8C4"/>
+            <a:srgbClr val="E0664A"/>
           </a:solidFill>
           <a:ln>
             <a:noFill/>
@@ -12903,9 +12903,9 @@
             <a:r>
               <a:rPr sz="2800" b="0">
                 <a:solidFill>
-                  <a:srgbClr val="20190F"/>
-                </a:solidFill>
-                <a:latin typeface="Arial"/>
+                  <a:srgbClr val="2B2B2B"/>
+                </a:solidFill>
+                <a:latin typeface="Calibri"/>
               </a:rPr>
               <a:t>•  Owed is not in the tin</a:t>
             </a:r>
@@ -12919,9 +12919,9 @@
             <a:r>
               <a:rPr sz="2800" b="0">
                 <a:solidFill>
-                  <a:srgbClr val="20190F"/>
-                </a:solidFill>
-                <a:latin typeface="Arial"/>
+                  <a:srgbClr val="2B2B2B"/>
+                </a:solidFill>
+                <a:latin typeface="Calibri"/>
               </a:rPr>
               <a:t>•  Agree the pay date in writing</a:t>
             </a:r>
@@ -12935,9 +12935,9 @@
             <a:r>
               <a:rPr sz="2800" b="0">
                 <a:solidFill>
-                  <a:srgbClr val="20190F"/>
-                </a:solidFill>
-                <a:latin typeface="Arial"/>
+                  <a:srgbClr val="2B2B2B"/>
+                </a:solidFill>
+                <a:latin typeface="Calibri"/>
               </a:rPr>
               <a:t>•  No new credit till it's paid</a:t>
             </a:r>

--- a/courses/build/farmer-money/R-D3.pptx
+++ b/courses/build/farmer-money/R-D3.pptx
@@ -1347,7 +1347,7 @@
           </a:p>
           <a:p>
             <a:r>
-              <a:t>Clip R-ANI-08: public/course-animations/market-community/watch-09-surplus-routes.mp4</a:t>
+              <a:t>Clip R-ANI-08: public/course-media/farmer-money/R-ANI-08.mp4</a:t>
             </a:r>
           </a:p>
         </p:txBody>
@@ -1649,7 +1649,7 @@
           </a:p>
           <a:p>
             <a:r>
-              <a:t>Clip R-ANI-09: public/course-animations/market-community/watch-14-community-network.mp4</a:t>
+              <a:t>Clip R-ANI-09: public/course-media/farmer-money/R-ANI-09.mp4</a:t>
             </a:r>
           </a:p>
         </p:txBody>
